--- a/Apresentação/Aula_Teste_CPU_Unifatea_Atualizada.pptx
+++ b/Apresentação/Aula_Teste_CPU_Unifatea_Atualizada.pptx
@@ -5,7 +5,7 @@
     <p:sldMasterId id="2147483648" r:id="rId1"/>
   </p:sldMasterIdLst>
   <p:notesMasterIdLst>
-    <p:notesMasterId r:id="rId16"/>
+    <p:notesMasterId r:id="rId17"/>
   </p:notesMasterIdLst>
   <p:sldIdLst>
     <p:sldId id="256" r:id="rId2"/>
@@ -22,6 +22,7 @@
     <p:sldId id="267" r:id="rId13"/>
     <p:sldId id="268" r:id="rId14"/>
     <p:sldId id="270" r:id="rId15"/>
+    <p:sldId id="271" r:id="rId16"/>
   </p:sldIdLst>
   <p:sldSz cx="12192000" cy="6858000"/>
   <p:notesSz cx="6858000" cy="9144000"/>
@@ -801,6 +802,83 @@
 </p:notes>
 </file>
 
+<file path=ppt/notesSlides/notesSlide15.xml><?xml version="1.0" encoding="utf-8"?>
+<p:notes xmlns:a="http://schemas.openxmlformats.org/drawingml/2006/main" xmlns:r="http://schemas.openxmlformats.org/officeDocument/2006/relationships" xmlns:p="http://schemas.openxmlformats.org/presentationml/2006/main">
+  <p:cSld>
+    <p:spTree>
+      <p:nvGrpSpPr>
+        <p:cNvPr id="1" name=""/>
+        <p:cNvGrpSpPr/>
+        <p:nvPr/>
+      </p:nvGrpSpPr>
+      <p:grpSpPr>
+        <a:xfrm>
+          <a:off x="0" y="0"/>
+          <a:ext cx="0" cy="0"/>
+          <a:chOff x="0" y="0"/>
+          <a:chExt cx="0" cy="0"/>
+        </a:xfrm>
+      </p:grpSpPr>
+      <p:sp>
+        <p:nvSpPr>
+          <p:cNvPr id="2" name="Slide Image Placeholder 1"/>
+          <p:cNvSpPr>
+            <a:spLocks noGrp="1" noRot="1" noChangeAspect="1"/>
+          </p:cNvSpPr>
+          <p:nvPr>
+            <p:ph type="sldImg"/>
+          </p:nvPr>
+        </p:nvSpPr>
+        <p:spPr/>
+      </p:sp>
+      <p:sp>
+        <p:nvSpPr>
+          <p:cNvPr id="3" name="Notes Placeholder 2"/>
+          <p:cNvSpPr>
+            <a:spLocks noGrp="1"/>
+          </p:cNvSpPr>
+          <p:nvPr>
+            <p:ph type="body" idx="1"/>
+          </p:nvPr>
+        </p:nvSpPr>
+        <p:spPr/>
+        <p:txBody>
+          <a:bodyPr/>
+          <a:lstStyle/>
+          <a:p>
+            <a:r>
+              <a:t>Fontes consultadas em 22/10/2026. Foto https://commons.wikimedia.org/wiki/File:Intel_core_i5-8400_top_IMGP6108_smial_wp.jpg . Esquemas são modelos simplificados. Não afirmar que todas as instruções usam ULA ou que PC sempre incrementa em 1; esse incremento pertence ao modelo fictício do exemplo.</a:t>
+            </a:r>
+          </a:p>
+        </p:txBody>
+      </p:sp>
+      <p:sp>
+        <p:nvSpPr>
+          <p:cNvPr id="4" name="Slide Number Placeholder 3"/>
+          <p:cNvSpPr>
+            <a:spLocks noGrp="1"/>
+          </p:cNvSpPr>
+          <p:nvPr>
+            <p:ph type="sldNum" idx="5"/>
+          </p:nvPr>
+        </p:nvSpPr>
+        <p:spPr/>
+        <p:txBody>
+          <a:bodyPr/>
+          <a:lstStyle/>
+          <a:p>
+            <a:endParaRPr/>
+          </a:p>
+        </p:txBody>
+      </p:sp>
+    </p:spTree>
+  </p:cSld>
+  <p:clrMapOvr>
+    <a:masterClrMapping/>
+  </p:clrMapOvr>
+</p:notes>
+</file>
+
 <file path=ppt/notesSlides/notesSlide2.xml><?xml version="1.0" encoding="utf-8"?>
 <p:notes xmlns:a="http://schemas.openxmlformats.org/drawingml/2006/main" xmlns:r="http://schemas.openxmlformats.org/officeDocument/2006/relationships" xmlns:p="http://schemas.openxmlformats.org/presentationml/2006/main">
   <p:cSld>
@@ -1484,7 +1562,7 @@
           <p:cNvPr id="3" name="Title">
             <a:extLst>
               <a:ext uri="{FF2B5EF4-FFF2-40B4-BE49-F238E27FC236}">
-                <a16:creationId xmlns:a16="http://schemas.microsoft.com/office/drawing/2014/main" xmlns="" id="{EE694F0D-2B94-4FAA-AD3E-B5BB2FBF2417}"/>
+                <a16:creationId xmlns="" xmlns:a16="http://schemas.microsoft.com/office/drawing/2014/main" id="{EE694F0D-2B94-4FAA-AD3E-B5BB2FBF2417}"/>
               </a:ext>
             </a:extLst>
           </p:cNvPr>
@@ -1715,7 +1793,7 @@
           <p:cNvPr id="2" name="Subtitle">
             <a:extLst>
               <a:ext uri="{FF2B5EF4-FFF2-40B4-BE49-F238E27FC236}">
-                <a16:creationId xmlns:a16="http://schemas.microsoft.com/office/drawing/2014/main" xmlns="" id="{F22D6118-FE2E-417C-848C-808261EDB328}"/>
+                <a16:creationId xmlns="" xmlns:a16="http://schemas.microsoft.com/office/drawing/2014/main" id="{F22D6118-FE2E-417C-848C-808261EDB328}"/>
               </a:ext>
             </a:extLst>
           </p:cNvPr>
@@ -1971,7 +2049,7 @@
           <p:cNvPr id="2" name="Section title">
             <a:extLst>
               <a:ext uri="{FF2B5EF4-FFF2-40B4-BE49-F238E27FC236}">
-                <a16:creationId xmlns:a16="http://schemas.microsoft.com/office/drawing/2014/main" xmlns="" id="{49BF8621-5FED-423F-98E6-34C253407F3E}"/>
+                <a16:creationId xmlns="" xmlns:a16="http://schemas.microsoft.com/office/drawing/2014/main" id="{49BF8621-5FED-423F-98E6-34C253407F3E}"/>
               </a:ext>
             </a:extLst>
           </p:cNvPr>
@@ -2227,7 +2305,7 @@
           <p:cNvPr id="3" name="Title">
             <a:extLst>
               <a:ext uri="{FF2B5EF4-FFF2-40B4-BE49-F238E27FC236}">
-                <a16:creationId xmlns:a16="http://schemas.microsoft.com/office/drawing/2014/main" xmlns="" id="{77FB836F-D64F-409C-AE5F-481176A18D4F}"/>
+                <a16:creationId xmlns="" xmlns:a16="http://schemas.microsoft.com/office/drawing/2014/main" id="{77FB836F-D64F-409C-AE5F-481176A18D4F}"/>
               </a:ext>
             </a:extLst>
           </p:cNvPr>
@@ -2458,7 +2536,7 @@
           <p:cNvPr id="2" name="Body">
             <a:extLst>
               <a:ext uri="{FF2B5EF4-FFF2-40B4-BE49-F238E27FC236}">
-                <a16:creationId xmlns:a16="http://schemas.microsoft.com/office/drawing/2014/main" xmlns="" id="{8E6B5CE1-1F88-4197-BD4E-E41CE6A1994E}"/>
+                <a16:creationId xmlns="" xmlns:a16="http://schemas.microsoft.com/office/drawing/2014/main" id="{8E6B5CE1-1F88-4197-BD4E-E41CE6A1994E}"/>
               </a:ext>
             </a:extLst>
           </p:cNvPr>
@@ -2714,7 +2792,7 @@
           <p:cNvPr id="4" name="Title">
             <a:extLst>
               <a:ext uri="{FF2B5EF4-FFF2-40B4-BE49-F238E27FC236}">
-                <a16:creationId xmlns:a16="http://schemas.microsoft.com/office/drawing/2014/main" xmlns="" id="{05A1732B-0564-478C-BCA3-A20CB3DEA7E4}"/>
+                <a16:creationId xmlns="" xmlns:a16="http://schemas.microsoft.com/office/drawing/2014/main" id="{05A1732B-0564-478C-BCA3-A20CB3DEA7E4}"/>
               </a:ext>
             </a:extLst>
           </p:cNvPr>
@@ -2945,7 +3023,7 @@
           <p:cNvPr id="2" name="Left column">
             <a:extLst>
               <a:ext uri="{FF2B5EF4-FFF2-40B4-BE49-F238E27FC236}">
-                <a16:creationId xmlns:a16="http://schemas.microsoft.com/office/drawing/2014/main" xmlns="" id="{B913F36A-1C2F-4460-83C9-9350A0719721}"/>
+                <a16:creationId xmlns="" xmlns:a16="http://schemas.microsoft.com/office/drawing/2014/main" id="{B913F36A-1C2F-4460-83C9-9350A0719721}"/>
               </a:ext>
             </a:extLst>
           </p:cNvPr>
@@ -3176,7 +3254,7 @@
           <p:cNvPr id="3" name="Right column">
             <a:extLst>
               <a:ext uri="{FF2B5EF4-FFF2-40B4-BE49-F238E27FC236}">
-                <a16:creationId xmlns:a16="http://schemas.microsoft.com/office/drawing/2014/main" xmlns="" id="{56E8757B-EFD7-4A83-A87B-BB90E87A5327}"/>
+                <a16:creationId xmlns="" xmlns:a16="http://schemas.microsoft.com/office/drawing/2014/main" id="{56E8757B-EFD7-4A83-A87B-BB90E87A5327}"/>
               </a:ext>
             </a:extLst>
           </p:cNvPr>
@@ -3432,7 +3510,7 @@
           <p:cNvPr id="3" name="Title">
             <a:extLst>
               <a:ext uri="{FF2B5EF4-FFF2-40B4-BE49-F238E27FC236}">
-                <a16:creationId xmlns:a16="http://schemas.microsoft.com/office/drawing/2014/main" xmlns="" id="{78FFC52B-CFF3-40E2-8D4E-70D026D5CA32}"/>
+                <a16:creationId xmlns="" xmlns:a16="http://schemas.microsoft.com/office/drawing/2014/main" id="{78FFC52B-CFF3-40E2-8D4E-70D026D5CA32}"/>
               </a:ext>
             </a:extLst>
           </p:cNvPr>
@@ -3663,7 +3741,7 @@
           <p:cNvPr id="2" name="Left column">
             <a:extLst>
               <a:ext uri="{FF2B5EF4-FFF2-40B4-BE49-F238E27FC236}">
-                <a16:creationId xmlns:a16="http://schemas.microsoft.com/office/drawing/2014/main" xmlns="" id="{3D272502-691A-4F46-9D16-02251C4EF095}"/>
+                <a16:creationId xmlns="" xmlns:a16="http://schemas.microsoft.com/office/drawing/2014/main" id="{3D272502-691A-4F46-9D16-02251C4EF095}"/>
               </a:ext>
             </a:extLst>
           </p:cNvPr>
@@ -4265,7 +4343,7 @@
           <p:cNvPr id="7" name="heading">
             <a:extLst>
               <a:ext uri="{FF2B5EF4-FFF2-40B4-BE49-F238E27FC236}">
-                <a16:creationId xmlns:a16="http://schemas.microsoft.com/office/drawing/2014/main" xmlns="" id="{D4B4024F-A3F9-4630-806C-4ED47C4D98E5}"/>
+                <a16:creationId xmlns="" xmlns:a16="http://schemas.microsoft.com/office/drawing/2014/main" id="{D4B4024F-A3F9-4630-806C-4ED47C4D98E5}"/>
               </a:ext>
             </a:extLst>
           </p:cNvPr>
@@ -4434,7 +4512,7 @@
           <p:cNvPr id="3" name="title">
             <a:extLst>
               <a:ext uri="{FF2B5EF4-FFF2-40B4-BE49-F238E27FC236}">
-                <a16:creationId xmlns:a16="http://schemas.microsoft.com/office/drawing/2014/main" xmlns="" id="{DC210C80-B2E5-4F53-B4C1-5BBD00DDFEA6}"/>
+                <a16:creationId xmlns="" xmlns:a16="http://schemas.microsoft.com/office/drawing/2014/main" id="{DC210C80-B2E5-4F53-B4C1-5BBD00DDFEA6}"/>
               </a:ext>
             </a:extLst>
           </p:cNvPr>
@@ -4627,7 +4705,7 @@
           <p:cNvPr id="4" name="components">
             <a:extLst>
               <a:ext uri="{FF2B5EF4-FFF2-40B4-BE49-F238E27FC236}">
-                <a16:creationId xmlns:a16="http://schemas.microsoft.com/office/drawing/2014/main" xmlns="" id="{73ACCB0A-C20C-4AEB-84FB-CB990D992ED8}"/>
+                <a16:creationId xmlns="" xmlns:a16="http://schemas.microsoft.com/office/drawing/2014/main" id="{73ACCB0A-C20C-4AEB-84FB-CB990D992ED8}"/>
               </a:ext>
             </a:extLst>
           </p:cNvPr>
@@ -4796,7 +4874,7 @@
           <p:cNvPr id="5" name="objective">
             <a:extLst>
               <a:ext uri="{FF2B5EF4-FFF2-40B4-BE49-F238E27FC236}">
-                <a16:creationId xmlns:a16="http://schemas.microsoft.com/office/drawing/2014/main" xmlns="" id="{B8932FBD-A91F-48E1-9FD3-F8050C72B647}"/>
+                <a16:creationId xmlns="" xmlns:a16="http://schemas.microsoft.com/office/drawing/2014/main" id="{B8932FBD-A91F-48E1-9FD3-F8050C72B647}"/>
               </a:ext>
             </a:extLst>
           </p:cNvPr>
@@ -4989,7 +5067,7 @@
           <p:cNvPr id="6" name="author">
             <a:extLst>
               <a:ext uri="{FF2B5EF4-FFF2-40B4-BE49-F238E27FC236}">
-                <a16:creationId xmlns:a16="http://schemas.microsoft.com/office/drawing/2014/main" xmlns="" id="{901F5997-43C6-4D1C-A33E-7DCA29140B13}"/>
+                <a16:creationId xmlns="" xmlns:a16="http://schemas.microsoft.com/office/drawing/2014/main" id="{901F5997-43C6-4D1C-A33E-7DCA29140B13}"/>
               </a:ext>
             </a:extLst>
           </p:cNvPr>
@@ -5158,7 +5236,7 @@
           <p:cNvPr id="8" name="Retângulo 7">
             <a:extLst>
               <a:ext uri="{FF2B5EF4-FFF2-40B4-BE49-F238E27FC236}">
-                <a16:creationId xmlns:a16="http://schemas.microsoft.com/office/drawing/2014/main" xmlns="" id="{9A370D75-8523-453E-AA22-DF541B1749C6}"/>
+                <a16:creationId xmlns="" xmlns:a16="http://schemas.microsoft.com/office/drawing/2014/main" id="{9A370D75-8523-453E-AA22-DF541B1749C6}"/>
               </a:ext>
             </a:extLst>
           </p:cNvPr>
@@ -5313,7 +5391,7 @@
     </p:spTree>
     <p:extLst>
       <p:ext uri="{BB962C8B-B14F-4D97-AF65-F5344CB8AC3E}">
-        <p14:creationId xmlns:p14="http://schemas.microsoft.com/office/powerpoint/2010/main" xmlns="" val="2043564844"/>
+        <p14:creationId xmlns="" xmlns:p14="http://schemas.microsoft.com/office/powerpoint/2010/main" val="2043564844"/>
       </p:ext>
     </p:extLst>
   </p:cSld>
@@ -5353,7 +5431,7 @@
           <p:cNvPr id="11" name="heading">
             <a:extLst>
               <a:ext uri="{FF2B5EF4-FFF2-40B4-BE49-F238E27FC236}">
-                <a16:creationId xmlns:a16="http://schemas.microsoft.com/office/drawing/2014/main" xmlns="" id="{00E8891B-A82E-4F5C-B2D7-A0D5A889953D}"/>
+                <a16:creationId xmlns="" xmlns:a16="http://schemas.microsoft.com/office/drawing/2014/main" id="{00E8891B-A82E-4F5C-B2D7-A0D5A889953D}"/>
               </a:ext>
             </a:extLst>
           </p:cNvPr>
@@ -5522,7 +5600,7 @@
           <p:cNvPr id="3" name="1  BUSCA-label">
             <a:extLst>
               <a:ext uri="{FF2B5EF4-FFF2-40B4-BE49-F238E27FC236}">
-                <a16:creationId xmlns:a16="http://schemas.microsoft.com/office/drawing/2014/main" xmlns="" id="{806BD815-6DEA-47E8-90CC-4CE20455277A}"/>
+                <a16:creationId xmlns="" xmlns:a16="http://schemas.microsoft.com/office/drawing/2014/main" id="{806BD815-6DEA-47E8-90CC-4CE20455277A}"/>
               </a:ext>
             </a:extLst>
           </p:cNvPr>
@@ -5691,7 +5769,7 @@
           <p:cNvPr id="4" name="1  BUSCA-desc">
             <a:extLst>
               <a:ext uri="{FF2B5EF4-FFF2-40B4-BE49-F238E27FC236}">
-                <a16:creationId xmlns:a16="http://schemas.microsoft.com/office/drawing/2014/main" xmlns="" id="{D20F153D-0C78-4A66-BDDD-298C9D9F383E}"/>
+                <a16:creationId xmlns="" xmlns:a16="http://schemas.microsoft.com/office/drawing/2014/main" id="{D20F153D-0C78-4A66-BDDD-298C9D9F383E}"/>
               </a:ext>
             </a:extLst>
           </p:cNvPr>
@@ -5860,7 +5938,7 @@
           <p:cNvPr id="5" name="2  DECODIFICAÇÃO-label">
             <a:extLst>
               <a:ext uri="{FF2B5EF4-FFF2-40B4-BE49-F238E27FC236}">
-                <a16:creationId xmlns:a16="http://schemas.microsoft.com/office/drawing/2014/main" xmlns="" id="{C4CB60E6-3447-45E4-883D-0BAD2F0B7EAA}"/>
+                <a16:creationId xmlns="" xmlns:a16="http://schemas.microsoft.com/office/drawing/2014/main" id="{C4CB60E6-3447-45E4-883D-0BAD2F0B7EAA}"/>
               </a:ext>
             </a:extLst>
           </p:cNvPr>
@@ -6029,7 +6107,7 @@
           <p:cNvPr id="6" name="2  DECODIFICAÇÃO-desc">
             <a:extLst>
               <a:ext uri="{FF2B5EF4-FFF2-40B4-BE49-F238E27FC236}">
-                <a16:creationId xmlns:a16="http://schemas.microsoft.com/office/drawing/2014/main" xmlns="" id="{EF141FF8-3312-4D00-9A0F-440C689DBF6A}"/>
+                <a16:creationId xmlns="" xmlns:a16="http://schemas.microsoft.com/office/drawing/2014/main" id="{EF141FF8-3312-4D00-9A0F-440C689DBF6A}"/>
               </a:ext>
             </a:extLst>
           </p:cNvPr>
@@ -6198,7 +6276,7 @@
           <p:cNvPr id="7" name="3  EXECUÇÃO-label">
             <a:extLst>
               <a:ext uri="{FF2B5EF4-FFF2-40B4-BE49-F238E27FC236}">
-                <a16:creationId xmlns:a16="http://schemas.microsoft.com/office/drawing/2014/main" xmlns="" id="{EF9BCF93-C0E8-4A95-A1C2-8C1A2B89D283}"/>
+                <a16:creationId xmlns="" xmlns:a16="http://schemas.microsoft.com/office/drawing/2014/main" id="{EF9BCF93-C0E8-4A95-A1C2-8C1A2B89D283}"/>
               </a:ext>
             </a:extLst>
           </p:cNvPr>
@@ -6367,7 +6445,7 @@
           <p:cNvPr id="8" name="3  EXECUÇÃO-desc">
             <a:extLst>
               <a:ext uri="{FF2B5EF4-FFF2-40B4-BE49-F238E27FC236}">
-                <a16:creationId xmlns:a16="http://schemas.microsoft.com/office/drawing/2014/main" xmlns="" id="{4E2F2EE0-E008-44A1-AEB1-2EF961ED1449}"/>
+                <a16:creationId xmlns="" xmlns:a16="http://schemas.microsoft.com/office/drawing/2014/main" id="{4E2F2EE0-E008-44A1-AEB1-2EF961ED1449}"/>
               </a:ext>
             </a:extLst>
           </p:cNvPr>
@@ -6536,7 +6614,7 @@
           <p:cNvPr id="9" name="4  GRAVAÇÃO-label">
             <a:extLst>
               <a:ext uri="{FF2B5EF4-FFF2-40B4-BE49-F238E27FC236}">
-                <a16:creationId xmlns:a16="http://schemas.microsoft.com/office/drawing/2014/main" xmlns="" id="{D8F4BD53-EE90-4295-9B9B-3A7690E0364E}"/>
+                <a16:creationId xmlns="" xmlns:a16="http://schemas.microsoft.com/office/drawing/2014/main" id="{D8F4BD53-EE90-4295-9B9B-3A7690E0364E}"/>
               </a:ext>
             </a:extLst>
           </p:cNvPr>
@@ -6705,7 +6783,7 @@
           <p:cNvPr id="10" name="4  GRAVAÇÃO-desc">
             <a:extLst>
               <a:ext uri="{FF2B5EF4-FFF2-40B4-BE49-F238E27FC236}">
-                <a16:creationId xmlns:a16="http://schemas.microsoft.com/office/drawing/2014/main" xmlns="" id="{29CE3770-7B77-4569-8E81-6CD22D459B13}"/>
+                <a16:creationId xmlns="" xmlns:a16="http://schemas.microsoft.com/office/drawing/2014/main" id="{29CE3770-7B77-4569-8E81-6CD22D459B13}"/>
               </a:ext>
             </a:extLst>
           </p:cNvPr>
@@ -6874,7 +6952,7 @@
           <p:cNvPr id="12" name="Retângulo 11">
             <a:extLst>
               <a:ext uri="{FF2B5EF4-FFF2-40B4-BE49-F238E27FC236}">
-                <a16:creationId xmlns:a16="http://schemas.microsoft.com/office/drawing/2014/main" xmlns="" id="{74ADECE6-4E4D-418A-B707-68FF58706F26}"/>
+                <a16:creationId xmlns="" xmlns:a16="http://schemas.microsoft.com/office/drawing/2014/main" id="{74ADECE6-4E4D-418A-B707-68FF58706F26}"/>
               </a:ext>
             </a:extLst>
           </p:cNvPr>
@@ -7029,7 +7107,7 @@
     </p:spTree>
     <p:extLst>
       <p:ext uri="{BB962C8B-B14F-4D97-AF65-F5344CB8AC3E}">
-        <p14:creationId xmlns:p14="http://schemas.microsoft.com/office/powerpoint/2010/main" xmlns="" val="1475045184"/>
+        <p14:creationId xmlns="" xmlns:p14="http://schemas.microsoft.com/office/powerpoint/2010/main" val="1475045184"/>
       </p:ext>
     </p:extLst>
   </p:cSld>
@@ -7069,7 +7147,7 @@
           <p:cNvPr id="7" name="heading">
             <a:extLst>
               <a:ext uri="{FF2B5EF4-FFF2-40B4-BE49-F238E27FC236}">
-                <a16:creationId xmlns:a16="http://schemas.microsoft.com/office/drawing/2014/main" xmlns="" id="{DBBD2F09-5B43-4774-BFE2-EDC83B495588}"/>
+                <a16:creationId xmlns="" xmlns:a16="http://schemas.microsoft.com/office/drawing/2014/main" id="{DBBD2F09-5B43-4774-BFE2-EDC83B495588}"/>
               </a:ext>
             </a:extLst>
           </p:cNvPr>
@@ -7238,7 +7316,7 @@
           <p:cNvPr id="3" name="code">
             <a:extLst>
               <a:ext uri="{FF2B5EF4-FFF2-40B4-BE49-F238E27FC236}">
-                <a16:creationId xmlns:a16="http://schemas.microsoft.com/office/drawing/2014/main" xmlns="" id="{46205AF4-722C-4FE8-A5FB-67A05EA34C13}"/>
+                <a16:creationId xmlns="" xmlns:a16="http://schemas.microsoft.com/office/drawing/2014/main" id="{46205AF4-722C-4FE8-A5FB-67A05EA34C13}"/>
               </a:ext>
             </a:extLst>
           </p:cNvPr>
@@ -7407,7 +7485,7 @@
           <p:cNvPr id="4" name="meaning">
             <a:extLst>
               <a:ext uri="{FF2B5EF4-FFF2-40B4-BE49-F238E27FC236}">
-                <a16:creationId xmlns:a16="http://schemas.microsoft.com/office/drawing/2014/main" xmlns="" id="{799F3210-D26D-41AB-B074-DF9CF4743DB8}"/>
+                <a16:creationId xmlns="" xmlns:a16="http://schemas.microsoft.com/office/drawing/2014/main" id="{799F3210-D26D-41AB-B074-DF9CF4743DB8}"/>
               </a:ext>
             </a:extLst>
           </p:cNvPr>
@@ -7576,7 +7654,7 @@
           <p:cNvPr id="5" name="Tabela 4">
             <a:extLst>
               <a:ext uri="{FF2B5EF4-FFF2-40B4-BE49-F238E27FC236}">
-                <a16:creationId xmlns:a16="http://schemas.microsoft.com/office/drawing/2014/main" xmlns="" id="{59BEBDD4-DBCD-4873-8C18-0D8256246A06}"/>
+                <a16:creationId xmlns="" xmlns:a16="http://schemas.microsoft.com/office/drawing/2014/main" id="{59BEBDD4-DBCD-4873-8C18-0D8256246A06}"/>
               </a:ext>
             </a:extLst>
           </p:cNvPr>
@@ -8024,7 +8102,7 @@
           <p:cNvPr id="6" name="assumption">
             <a:extLst>
               <a:ext uri="{FF2B5EF4-FFF2-40B4-BE49-F238E27FC236}">
-                <a16:creationId xmlns:a16="http://schemas.microsoft.com/office/drawing/2014/main" xmlns="" id="{C1ADC514-10D5-47DB-8AD7-881163742F02}"/>
+                <a16:creationId xmlns="" xmlns:a16="http://schemas.microsoft.com/office/drawing/2014/main" id="{C1ADC514-10D5-47DB-8AD7-881163742F02}"/>
               </a:ext>
             </a:extLst>
           </p:cNvPr>
@@ -8193,7 +8271,7 @@
           <p:cNvPr id="8" name="Retângulo 7">
             <a:extLst>
               <a:ext uri="{FF2B5EF4-FFF2-40B4-BE49-F238E27FC236}">
-                <a16:creationId xmlns:a16="http://schemas.microsoft.com/office/drawing/2014/main" xmlns="" id="{9D0B39F0-DA81-4762-935D-F80ABA388A42}"/>
+                <a16:creationId xmlns="" xmlns:a16="http://schemas.microsoft.com/office/drawing/2014/main" id="{9D0B39F0-DA81-4762-935D-F80ABA388A42}"/>
               </a:ext>
             </a:extLst>
           </p:cNvPr>
@@ -8348,7 +8426,7 @@
     </p:spTree>
     <p:extLst>
       <p:ext uri="{BB962C8B-B14F-4D97-AF65-F5344CB8AC3E}">
-        <p14:creationId xmlns:p14="http://schemas.microsoft.com/office/powerpoint/2010/main" xmlns="" val="1799019473"/>
+        <p14:creationId xmlns="" xmlns:p14="http://schemas.microsoft.com/office/powerpoint/2010/main" val="1799019473"/>
       </p:ext>
     </p:extLst>
   </p:cSld>
@@ -8388,7 +8466,7 @@
           <p:cNvPr id="7" name="heading">
             <a:extLst>
               <a:ext uri="{FF2B5EF4-FFF2-40B4-BE49-F238E27FC236}">
-                <a16:creationId xmlns:a16="http://schemas.microsoft.com/office/drawing/2014/main" xmlns="" id="{B667956B-B98C-44A8-B5C5-55DEC0C060F0}"/>
+                <a16:creationId xmlns="" xmlns:a16="http://schemas.microsoft.com/office/drawing/2014/main" id="{B667956B-B98C-44A8-B5C5-55DEC0C060F0}"/>
               </a:ext>
             </a:extLst>
           </p:cNvPr>
@@ -8557,7 +8635,7 @@
           <p:cNvPr id="3" name="fetch">
             <a:extLst>
               <a:ext uri="{FF2B5EF4-FFF2-40B4-BE49-F238E27FC236}">
-                <a16:creationId xmlns:a16="http://schemas.microsoft.com/office/drawing/2014/main" xmlns="" id="{618568FF-33D8-4C2C-91D0-67B1FBF80A6C}"/>
+                <a16:creationId xmlns="" xmlns:a16="http://schemas.microsoft.com/office/drawing/2014/main" id="{618568FF-33D8-4C2C-91D0-67B1FBF80A6C}"/>
               </a:ext>
             </a:extLst>
           </p:cNvPr>
@@ -8726,7 +8804,7 @@
           <p:cNvPr id="4" name="code">
             <a:extLst>
               <a:ext uri="{FF2B5EF4-FFF2-40B4-BE49-F238E27FC236}">
-                <a16:creationId xmlns:a16="http://schemas.microsoft.com/office/drawing/2014/main" xmlns="" id="{55890108-C7D7-4BAD-89CD-10A26BF46B85}"/>
+                <a16:creationId xmlns="" xmlns:a16="http://schemas.microsoft.com/office/drawing/2014/main" id="{55890108-C7D7-4BAD-89CD-10A26BF46B85}"/>
               </a:ext>
             </a:extLst>
           </p:cNvPr>
@@ -8943,7 +9021,7 @@
           <p:cNvPr id="5" name="decode">
             <a:extLst>
               <a:ext uri="{FF2B5EF4-FFF2-40B4-BE49-F238E27FC236}">
-                <a16:creationId xmlns:a16="http://schemas.microsoft.com/office/drawing/2014/main" xmlns="" id="{31B43BAB-E8A6-4BC8-BC97-6E48E7282528}"/>
+                <a16:creationId xmlns="" xmlns:a16="http://schemas.microsoft.com/office/drawing/2014/main" id="{31B43BAB-E8A6-4BC8-BC97-6E48E7282528}"/>
               </a:ext>
             </a:extLst>
           </p:cNvPr>
@@ -9112,7 +9190,7 @@
           <p:cNvPr id="6" name="decoded">
             <a:extLst>
               <a:ext uri="{FF2B5EF4-FFF2-40B4-BE49-F238E27FC236}">
-                <a16:creationId xmlns:a16="http://schemas.microsoft.com/office/drawing/2014/main" xmlns="" id="{5481C210-2582-4A67-9926-42AE56EA3073}"/>
+                <a16:creationId xmlns="" xmlns:a16="http://schemas.microsoft.com/office/drawing/2014/main" id="{5481C210-2582-4A67-9926-42AE56EA3073}"/>
               </a:ext>
             </a:extLst>
           </p:cNvPr>
@@ -9281,7 +9359,7 @@
           <p:cNvPr id="8" name="Retângulo 7">
             <a:extLst>
               <a:ext uri="{FF2B5EF4-FFF2-40B4-BE49-F238E27FC236}">
-                <a16:creationId xmlns:a16="http://schemas.microsoft.com/office/drawing/2014/main" xmlns="" id="{317BCAFF-6F21-4E32-8B5F-F3612F8ABF47}"/>
+                <a16:creationId xmlns="" xmlns:a16="http://schemas.microsoft.com/office/drawing/2014/main" id="{317BCAFF-6F21-4E32-8B5F-F3612F8ABF47}"/>
               </a:ext>
             </a:extLst>
           </p:cNvPr>
@@ -9436,7 +9514,7 @@
     </p:spTree>
     <p:extLst>
       <p:ext uri="{BB962C8B-B14F-4D97-AF65-F5344CB8AC3E}">
-        <p14:creationId xmlns:p14="http://schemas.microsoft.com/office/powerpoint/2010/main" xmlns="" val="1048241156"/>
+        <p14:creationId xmlns="" xmlns:p14="http://schemas.microsoft.com/office/powerpoint/2010/main" val="1048241156"/>
       </p:ext>
     </p:extLst>
   </p:cSld>
@@ -9476,7 +9554,7 @@
           <p:cNvPr id="8" name="heading">
             <a:extLst>
               <a:ext uri="{FF2B5EF4-FFF2-40B4-BE49-F238E27FC236}">
-                <a16:creationId xmlns:a16="http://schemas.microsoft.com/office/drawing/2014/main" xmlns="" id="{44569933-C6BB-4336-93C4-D1B85F633B62}"/>
+                <a16:creationId xmlns="" xmlns:a16="http://schemas.microsoft.com/office/drawing/2014/main" id="{44569933-C6BB-4336-93C4-D1B85F633B62}"/>
               </a:ext>
             </a:extLst>
           </p:cNvPr>
@@ -9645,7 +9723,7 @@
           <p:cNvPr id="3" name="calc">
             <a:extLst>
               <a:ext uri="{FF2B5EF4-FFF2-40B4-BE49-F238E27FC236}">
-                <a16:creationId xmlns:a16="http://schemas.microsoft.com/office/drawing/2014/main" xmlns="" id="{08B30833-EC9C-45B2-BF04-4105CAC262BA}"/>
+                <a16:creationId xmlns="" xmlns:a16="http://schemas.microsoft.com/office/drawing/2014/main" id="{08B30833-EC9C-45B2-BF04-4105CAC262BA}"/>
               </a:ext>
             </a:extLst>
           </p:cNvPr>
@@ -9814,7 +9892,7 @@
           <p:cNvPr id="4" name="operation">
             <a:extLst>
               <a:ext uri="{FF2B5EF4-FFF2-40B4-BE49-F238E27FC236}">
-                <a16:creationId xmlns:a16="http://schemas.microsoft.com/office/drawing/2014/main" xmlns="" id="{370911D7-C4E5-4E83-BF87-2591644C1A6E}"/>
+                <a16:creationId xmlns="" xmlns:a16="http://schemas.microsoft.com/office/drawing/2014/main" id="{370911D7-C4E5-4E83-BF87-2591644C1A6E}"/>
               </a:ext>
             </a:extLst>
           </p:cNvPr>
@@ -9983,7 +10061,7 @@
           <p:cNvPr id="5" name="Tabela 4">
             <a:extLst>
               <a:ext uri="{FF2B5EF4-FFF2-40B4-BE49-F238E27FC236}">
-                <a16:creationId xmlns:a16="http://schemas.microsoft.com/office/drawing/2014/main" xmlns="" id="{DE90579D-1D11-4909-824A-591ABE5D8E98}"/>
+                <a16:creationId xmlns="" xmlns:a16="http://schemas.microsoft.com/office/drawing/2014/main" id="{DE90579D-1D11-4909-824A-591ABE5D8E98}"/>
               </a:ext>
             </a:extLst>
           </p:cNvPr>
@@ -10537,7 +10615,7 @@
           <p:cNvPr id="6" name="write">
             <a:extLst>
               <a:ext uri="{FF2B5EF4-FFF2-40B4-BE49-F238E27FC236}">
-                <a16:creationId xmlns:a16="http://schemas.microsoft.com/office/drawing/2014/main" xmlns="" id="{D774996B-E26B-4110-A5A4-9B0D13545055}"/>
+                <a16:creationId xmlns="" xmlns:a16="http://schemas.microsoft.com/office/drawing/2014/main" id="{D774996B-E26B-4110-A5A4-9B0D13545055}"/>
               </a:ext>
             </a:extLst>
           </p:cNvPr>
@@ -10706,7 +10784,7 @@
           <p:cNvPr id="7" name="ram">
             <a:extLst>
               <a:ext uri="{FF2B5EF4-FFF2-40B4-BE49-F238E27FC236}">
-                <a16:creationId xmlns:a16="http://schemas.microsoft.com/office/drawing/2014/main" xmlns="" id="{F52AFB55-9FBA-473B-81A0-96B70CDBC98A}"/>
+                <a16:creationId xmlns="" xmlns:a16="http://schemas.microsoft.com/office/drawing/2014/main" id="{F52AFB55-9FBA-473B-81A0-96B70CDBC98A}"/>
               </a:ext>
             </a:extLst>
           </p:cNvPr>
@@ -10875,7 +10953,7 @@
           <p:cNvPr id="9" name="Retângulo 8">
             <a:extLst>
               <a:ext uri="{FF2B5EF4-FFF2-40B4-BE49-F238E27FC236}">
-                <a16:creationId xmlns:a16="http://schemas.microsoft.com/office/drawing/2014/main" xmlns="" id="{DCB9840E-16EA-44CA-9FC2-3B88449D7E42}"/>
+                <a16:creationId xmlns="" xmlns:a16="http://schemas.microsoft.com/office/drawing/2014/main" id="{DCB9840E-16EA-44CA-9FC2-3B88449D7E42}"/>
               </a:ext>
             </a:extLst>
           </p:cNvPr>
@@ -11030,7 +11108,7 @@
     </p:spTree>
     <p:extLst>
       <p:ext uri="{BB962C8B-B14F-4D97-AF65-F5344CB8AC3E}">
-        <p14:creationId xmlns:p14="http://schemas.microsoft.com/office/powerpoint/2010/main" xmlns="" val="1009439186"/>
+        <p14:creationId xmlns="" xmlns:p14="http://schemas.microsoft.com/office/powerpoint/2010/main" val="1009439186"/>
       </p:ext>
     </p:extLst>
   </p:cSld>
@@ -11070,7 +11148,7 @@
           <p:cNvPr id="9" name="Retângulo 8">
             <a:extLst>
               <a:ext uri="{FF2B5EF4-FFF2-40B4-BE49-F238E27FC236}">
-                <a16:creationId xmlns:a16="http://schemas.microsoft.com/office/drawing/2014/main" xmlns="" id="{8C77C768-39AC-4369-B25B-2AE0ABF99FEE}"/>
+                <a16:creationId xmlns="" xmlns:a16="http://schemas.microsoft.com/office/drawing/2014/main" id="{8C77C768-39AC-4369-B25B-2AE0ABF99FEE}"/>
               </a:ext>
             </a:extLst>
           </p:cNvPr>
@@ -11235,7 +11313,7 @@
           <p:cNvPr id="8" name="Retângulo 7">
             <a:extLst>
               <a:ext uri="{FF2B5EF4-FFF2-40B4-BE49-F238E27FC236}">
-                <a16:creationId xmlns:a16="http://schemas.microsoft.com/office/drawing/2014/main" xmlns="" id="{1D86915E-C494-4A52-9C86-DCEEE0629F49}"/>
+                <a16:creationId xmlns="" xmlns:a16="http://schemas.microsoft.com/office/drawing/2014/main" id="{1D86915E-C494-4A52-9C86-DCEEE0629F49}"/>
               </a:ext>
             </a:extLst>
           </p:cNvPr>
@@ -11720,7 +11798,422 @@
     </p:spTree>
     <p:extLst>
       <p:ext uri="{BB962C8B-B14F-4D97-AF65-F5344CB8AC3E}">
-        <p14:creationId xmlns:p14="http://schemas.microsoft.com/office/powerpoint/2010/main" xmlns="" val="1278490431"/>
+        <p14:creationId xmlns="" xmlns:p14="http://schemas.microsoft.com/office/powerpoint/2010/main" val="1278490431"/>
+      </p:ext>
+    </p:extLst>
+  </p:cSld>
+  <p:clrMapOvr>
+    <a:masterClrMapping/>
+  </p:clrMapOvr>
+</p:sld>
+</file>
+
+<file path=ppt/slides/slide15.xml><?xml version="1.0" encoding="utf-8"?>
+<p:sld xmlns:a="http://schemas.openxmlformats.org/drawingml/2006/main" xmlns:r="http://schemas.openxmlformats.org/officeDocument/2006/relationships" xmlns:p="http://schemas.openxmlformats.org/presentationml/2006/main">
+  <p:cSld>
+    <p:bg>
+      <p:bgPr>
+        <a:solidFill>
+          <a:srgbClr val="0D1726"/>
+        </a:solidFill>
+        <a:effectLst/>
+      </p:bgPr>
+    </p:bg>
+    <p:spTree>
+      <p:nvGrpSpPr>
+        <p:cNvPr id="1" name=""/>
+        <p:cNvGrpSpPr/>
+        <p:nvPr/>
+      </p:nvGrpSpPr>
+      <p:grpSpPr>
+        <a:xfrm>
+          <a:off x="0" y="0"/>
+          <a:ext cx="0" cy="0"/>
+          <a:chOff x="0" y="0"/>
+          <a:chExt cx="0" cy="0"/>
+        </a:xfrm>
+      </p:grpSpPr>
+      <p:sp>
+        <p:nvSpPr>
+          <p:cNvPr id="9" name="Retângulo 8">
+            <a:extLst>
+              <a:ext uri="{FF2B5EF4-FFF2-40B4-BE49-F238E27FC236}">
+                <a16:creationId xmlns="" xmlns:a16="http://schemas.microsoft.com/office/drawing/2014/main" id="{8C77C768-39AC-4369-B25B-2AE0ABF99FEE}"/>
+              </a:ext>
+            </a:extLst>
+          </p:cNvPr>
+          <p:cNvSpPr>
+            <a:spLocks noGrp="1"/>
+          </p:cNvSpPr>
+          <p:nvPr/>
+        </p:nvSpPr>
+        <p:spPr>
+          <a:xfrm>
+            <a:off x="609600" y="428625"/>
+            <a:ext cx="10953750" cy="666750"/>
+          </a:xfrm>
+          <a:prstGeom prst="rect">
+            <a:avLst/>
+          </a:prstGeom>
+          <a:noFill/>
+          <a:ln w="0">
+            <a:noFill/>
+            <a:prstDash val="solid"/>
+          </a:ln>
+        </p:spPr>
+        <p:txBody>
+          <a:bodyPr lIns="0" tIns="0" rIns="0" bIns="0"/>
+          <a:lstStyle>
+            <a:defPPr>
+              <a:defRPr sz="3000" b="1">
+                <a:solidFill>
+                  <a:srgbClr val="F5F7FF"/>
+                </a:solidFill>
+                <a:latin typeface="DejaVu Sans"/>
+                <a:ea typeface="DejaVu Sans"/>
+                <a:cs typeface="DejaVu Sans"/>
+              </a:defRPr>
+            </a:defPPr>
+            <a:lvl1pPr>
+              <a:defRPr sz="3000" b="1">
+                <a:solidFill>
+                  <a:srgbClr val="F5F7FF"/>
+                </a:solidFill>
+                <a:latin typeface="DejaVu Sans"/>
+                <a:ea typeface="DejaVu Sans"/>
+                <a:cs typeface="DejaVu Sans"/>
+              </a:defRPr>
+            </a:lvl1pPr>
+            <a:lvl2pPr>
+              <a:defRPr sz="3000" b="1">
+                <a:solidFill>
+                  <a:srgbClr val="F5F7FF"/>
+                </a:solidFill>
+                <a:latin typeface="DejaVu Sans"/>
+                <a:ea typeface="DejaVu Sans"/>
+                <a:cs typeface="DejaVu Sans"/>
+              </a:defRPr>
+            </a:lvl2pPr>
+            <a:lvl3pPr>
+              <a:defRPr sz="3000" b="1">
+                <a:solidFill>
+                  <a:srgbClr val="F5F7FF"/>
+                </a:solidFill>
+                <a:latin typeface="DejaVu Sans"/>
+                <a:ea typeface="DejaVu Sans"/>
+                <a:cs typeface="DejaVu Sans"/>
+              </a:defRPr>
+            </a:lvl3pPr>
+            <a:lvl4pPr>
+              <a:defRPr sz="3000" b="1">
+                <a:solidFill>
+                  <a:srgbClr val="F5F7FF"/>
+                </a:solidFill>
+                <a:latin typeface="DejaVu Sans"/>
+                <a:ea typeface="DejaVu Sans"/>
+                <a:cs typeface="DejaVu Sans"/>
+              </a:defRPr>
+            </a:lvl4pPr>
+            <a:lvl5pPr>
+              <a:defRPr sz="3000" b="1">
+                <a:solidFill>
+                  <a:srgbClr val="F5F7FF"/>
+                </a:solidFill>
+                <a:latin typeface="DejaVu Sans"/>
+                <a:ea typeface="DejaVu Sans"/>
+                <a:cs typeface="DejaVu Sans"/>
+              </a:defRPr>
+            </a:lvl5pPr>
+            <a:lvl6pPr>
+              <a:defRPr sz="3000" b="1">
+                <a:solidFill>
+                  <a:srgbClr val="F5F7FF"/>
+                </a:solidFill>
+                <a:latin typeface="DejaVu Sans"/>
+                <a:ea typeface="DejaVu Sans"/>
+                <a:cs typeface="DejaVu Sans"/>
+              </a:defRPr>
+            </a:lvl6pPr>
+            <a:lvl7pPr>
+              <a:defRPr sz="3000" b="1">
+                <a:solidFill>
+                  <a:srgbClr val="F5F7FF"/>
+                </a:solidFill>
+                <a:latin typeface="DejaVu Sans"/>
+                <a:ea typeface="DejaVu Sans"/>
+                <a:cs typeface="DejaVu Sans"/>
+              </a:defRPr>
+            </a:lvl7pPr>
+            <a:lvl8pPr>
+              <a:defRPr sz="3000" b="1">
+                <a:solidFill>
+                  <a:srgbClr val="F5F7FF"/>
+                </a:solidFill>
+                <a:latin typeface="DejaVu Sans"/>
+                <a:ea typeface="DejaVu Sans"/>
+                <a:cs typeface="DejaVu Sans"/>
+              </a:defRPr>
+            </a:lvl8pPr>
+            <a:lvl9pPr>
+              <a:defRPr sz="3000" b="1">
+                <a:solidFill>
+                  <a:srgbClr val="F5F7FF"/>
+                </a:solidFill>
+                <a:latin typeface="DejaVu Sans"/>
+                <a:ea typeface="DejaVu Sans"/>
+                <a:cs typeface="DejaVu Sans"/>
+              </a:defRPr>
+            </a:lvl9pPr>
+          </a:lstStyle>
+          <a:p>
+            <a:pPr>
+              <a:defRPr sz="3000" b="1">
+                <a:solidFill>
+                  <a:srgbClr val="F5F7FF"/>
+                </a:solidFill>
+                <a:latin typeface="DejaVu Sans"/>
+                <a:ea typeface="DejaVu Sans"/>
+                <a:cs typeface="DejaVu Sans"/>
+              </a:defRPr>
+            </a:pPr>
+            <a:endParaRPr sz="3000" b="1">
+              <a:solidFill>
+                <a:srgbClr val="F5F7FF"/>
+              </a:solidFill>
+              <a:latin typeface="DejaVu Sans"/>
+              <a:ea typeface="DejaVu Sans"/>
+              <a:cs typeface="DejaVu Sans"/>
+            </a:endParaRPr>
+          </a:p>
+        </p:txBody>
+      </p:sp>
+      <p:sp>
+        <p:nvSpPr>
+          <p:cNvPr id="8" name="Retângulo 7">
+            <a:extLst>
+              <a:ext uri="{FF2B5EF4-FFF2-40B4-BE49-F238E27FC236}">
+                <a16:creationId xmlns="" xmlns:a16="http://schemas.microsoft.com/office/drawing/2014/main" id="{1D86915E-C494-4A52-9C86-DCEEE0629F49}"/>
+              </a:ext>
+            </a:extLst>
+          </p:cNvPr>
+          <p:cNvSpPr>
+            <a:spLocks noGrp="1"/>
+          </p:cNvSpPr>
+          <p:nvPr/>
+        </p:nvSpPr>
+        <p:spPr>
+          <a:xfrm>
+            <a:off x="10953750" y="6334125"/>
+            <a:ext cx="619125" cy="285750"/>
+          </a:xfrm>
+          <a:prstGeom prst="rect">
+            <a:avLst/>
+          </a:prstGeom>
+          <a:noFill/>
+          <a:ln w="0">
+            <a:noFill/>
+            <a:prstDash val="solid"/>
+          </a:ln>
+        </p:spPr>
+        <p:txBody>
+          <a:bodyPr lIns="0" tIns="0" rIns="0" bIns="0"/>
+          <a:lstStyle>
+            <a:defPPr>
+              <a:defRPr sz="1200" b="0">
+                <a:solidFill>
+                  <a:srgbClr val="B8C5D8"/>
+                </a:solidFill>
+                <a:latin typeface="DejaVu Sans"/>
+                <a:ea typeface="DejaVu Sans"/>
+                <a:cs typeface="DejaVu Sans"/>
+              </a:defRPr>
+            </a:defPPr>
+            <a:lvl1pPr>
+              <a:defRPr sz="1200" b="0">
+                <a:solidFill>
+                  <a:srgbClr val="B8C5D8"/>
+                </a:solidFill>
+                <a:latin typeface="DejaVu Sans"/>
+                <a:ea typeface="DejaVu Sans"/>
+                <a:cs typeface="DejaVu Sans"/>
+              </a:defRPr>
+            </a:lvl1pPr>
+            <a:lvl2pPr>
+              <a:defRPr sz="1200" b="0">
+                <a:solidFill>
+                  <a:srgbClr val="B8C5D8"/>
+                </a:solidFill>
+                <a:latin typeface="DejaVu Sans"/>
+                <a:ea typeface="DejaVu Sans"/>
+                <a:cs typeface="DejaVu Sans"/>
+              </a:defRPr>
+            </a:lvl2pPr>
+            <a:lvl3pPr>
+              <a:defRPr sz="1200" b="0">
+                <a:solidFill>
+                  <a:srgbClr val="B8C5D8"/>
+                </a:solidFill>
+                <a:latin typeface="DejaVu Sans"/>
+                <a:ea typeface="DejaVu Sans"/>
+                <a:cs typeface="DejaVu Sans"/>
+              </a:defRPr>
+            </a:lvl3pPr>
+            <a:lvl4pPr>
+              <a:defRPr sz="1200" b="0">
+                <a:solidFill>
+                  <a:srgbClr val="B8C5D8"/>
+                </a:solidFill>
+                <a:latin typeface="DejaVu Sans"/>
+                <a:ea typeface="DejaVu Sans"/>
+                <a:cs typeface="DejaVu Sans"/>
+              </a:defRPr>
+            </a:lvl4pPr>
+            <a:lvl5pPr>
+              <a:defRPr sz="1200" b="0">
+                <a:solidFill>
+                  <a:srgbClr val="B8C5D8"/>
+                </a:solidFill>
+                <a:latin typeface="DejaVu Sans"/>
+                <a:ea typeface="DejaVu Sans"/>
+                <a:cs typeface="DejaVu Sans"/>
+              </a:defRPr>
+            </a:lvl5pPr>
+            <a:lvl6pPr>
+              <a:defRPr sz="1200" b="0">
+                <a:solidFill>
+                  <a:srgbClr val="B8C5D8"/>
+                </a:solidFill>
+                <a:latin typeface="DejaVu Sans"/>
+                <a:ea typeface="DejaVu Sans"/>
+                <a:cs typeface="DejaVu Sans"/>
+              </a:defRPr>
+            </a:lvl6pPr>
+            <a:lvl7pPr>
+              <a:defRPr sz="1200" b="0">
+                <a:solidFill>
+                  <a:srgbClr val="B8C5D8"/>
+                </a:solidFill>
+                <a:latin typeface="DejaVu Sans"/>
+                <a:ea typeface="DejaVu Sans"/>
+                <a:cs typeface="DejaVu Sans"/>
+              </a:defRPr>
+            </a:lvl7pPr>
+            <a:lvl8pPr>
+              <a:defRPr sz="1200" b="0">
+                <a:solidFill>
+                  <a:srgbClr val="B8C5D8"/>
+                </a:solidFill>
+                <a:latin typeface="DejaVu Sans"/>
+                <a:ea typeface="DejaVu Sans"/>
+                <a:cs typeface="DejaVu Sans"/>
+              </a:defRPr>
+            </a:lvl8pPr>
+            <a:lvl9pPr>
+              <a:defRPr sz="1200" b="0">
+                <a:solidFill>
+                  <a:srgbClr val="B8C5D8"/>
+                </a:solidFill>
+                <a:latin typeface="DejaVu Sans"/>
+                <a:ea typeface="DejaVu Sans"/>
+                <a:cs typeface="DejaVu Sans"/>
+              </a:defRPr>
+            </a:lvl9pPr>
+          </a:lstStyle>
+          <a:p>
+            <a:pPr>
+              <a:defRPr sz="1200" b="0">
+                <a:solidFill>
+                  <a:srgbClr val="B8C5D8"/>
+                </a:solidFill>
+                <a:latin typeface="DejaVu Sans"/>
+                <a:ea typeface="DejaVu Sans"/>
+                <a:cs typeface="DejaVu Sans"/>
+              </a:defRPr>
+            </a:pPr>
+            <a:r>
+              <a:rPr sz="1200" b="0">
+                <a:solidFill>
+                  <a:srgbClr val="B8C5D8"/>
+                </a:solidFill>
+                <a:latin typeface="DejaVu Sans"/>
+                <a:ea typeface="DejaVu Sans"/>
+                <a:cs typeface="DejaVu Sans"/>
+              </a:rPr>
+              <a:t>15</a:t>
+            </a:r>
+          </a:p>
+        </p:txBody>
+      </p:sp>
+      <p:sp>
+        <p:nvSpPr>
+          <p:cNvPr id="10" name="Retângulo 9"/>
+          <p:cNvSpPr/>
+          <p:nvPr/>
+        </p:nvSpPr>
+        <p:spPr>
+          <a:xfrm>
+            <a:off x="452398" y="1357298"/>
+            <a:ext cx="10858576" cy="1998176"/>
+          </a:xfrm>
+          <a:prstGeom prst="rect">
+            <a:avLst/>
+          </a:prstGeom>
+        </p:spPr>
+        <p:txBody>
+          <a:bodyPr wrap="square">
+            <a:spAutoFit/>
+          </a:bodyPr>
+          <a:lstStyle/>
+          <a:p>
+            <a:pPr algn="ctr">
+              <a:lnSpc>
+                <a:spcPct val="150000"/>
+              </a:lnSpc>
+            </a:pPr>
+            <a:r>
+              <a:rPr lang="pt-BR" sz="4400" dirty="0" smtClean="0">
+                <a:solidFill>
+                  <a:schemeClr val="bg1"/>
+                </a:solidFill>
+              </a:rPr>
+              <a:t>https://github.com/etecprofgiulianie-lab/aula_teste_exemplos.git</a:t>
+            </a:r>
+            <a:endParaRPr lang="pt-BR" sz="4400" dirty="0">
+              <a:solidFill>
+                <a:schemeClr val="bg1"/>
+              </a:solidFill>
+            </a:endParaRPr>
+          </a:p>
+        </p:txBody>
+      </p:sp>
+      <p:pic>
+        <p:nvPicPr>
+          <p:cNvPr id="5" name="Imagem 4" descr="Git-Logo-White.png"/>
+          <p:cNvPicPr>
+            <a:picLocks noChangeAspect="1"/>
+          </p:cNvPicPr>
+          <p:nvPr/>
+        </p:nvPicPr>
+        <p:blipFill>
+          <a:blip r:embed="rId3"/>
+          <a:stretch>
+            <a:fillRect/>
+          </a:stretch>
+        </p:blipFill>
+        <p:spPr>
+          <a:xfrm>
+            <a:off x="4095736" y="4000504"/>
+            <a:ext cx="3308235" cy="1387792"/>
+          </a:xfrm>
+          <a:prstGeom prst="rect">
+            <a:avLst/>
+          </a:prstGeom>
+        </p:spPr>
+      </p:pic>
+    </p:spTree>
+    <p:extLst>
+      <p:ext uri="{BB962C8B-B14F-4D97-AF65-F5344CB8AC3E}">
+        <p14:creationId xmlns="" xmlns:p14="http://schemas.microsoft.com/office/powerpoint/2010/main" val="1278490431"/>
       </p:ext>
     </p:extLst>
   </p:cSld>
@@ -11760,7 +12253,7 @@
           <p:cNvPr id="8" name="heading">
             <a:extLst>
               <a:ext uri="{FF2B5EF4-FFF2-40B4-BE49-F238E27FC236}">
-                <a16:creationId xmlns:a16="http://schemas.microsoft.com/office/drawing/2014/main" xmlns="" id="{9BBBAACF-651C-4902-B363-5BF94412238A}"/>
+                <a16:creationId xmlns="" xmlns:a16="http://schemas.microsoft.com/office/drawing/2014/main" id="{9BBBAACF-651C-4902-B363-5BF94412238A}"/>
               </a:ext>
             </a:extLst>
           </p:cNvPr>
@@ -11929,7 +12422,7 @@
           <p:cNvPr id="3" name="ARQUITETURA-label">
             <a:extLst>
               <a:ext uri="{FF2B5EF4-FFF2-40B4-BE49-F238E27FC236}">
-                <a16:creationId xmlns:a16="http://schemas.microsoft.com/office/drawing/2014/main" xmlns="" id="{AED4B36F-144C-474E-AC52-E3D114096052}"/>
+                <a16:creationId xmlns="" xmlns:a16="http://schemas.microsoft.com/office/drawing/2014/main" id="{AED4B36F-144C-474E-AC52-E3D114096052}"/>
               </a:ext>
             </a:extLst>
           </p:cNvPr>
@@ -12098,7 +12591,7 @@
           <p:cNvPr id="4" name="ARQUITETURA-desc">
             <a:extLst>
               <a:ext uri="{FF2B5EF4-FFF2-40B4-BE49-F238E27FC236}">
-                <a16:creationId xmlns:a16="http://schemas.microsoft.com/office/drawing/2014/main" xmlns="" id="{4A1D739D-35E1-4F5C-A996-1BC308099FCE}"/>
+                <a16:creationId xmlns="" xmlns:a16="http://schemas.microsoft.com/office/drawing/2014/main" id="{4A1D739D-35E1-4F5C-A996-1BC308099FCE}"/>
               </a:ext>
             </a:extLst>
           </p:cNvPr>
@@ -12291,7 +12784,7 @@
           <p:cNvPr id="5" name="ORGANIZAÇÃO-label">
             <a:extLst>
               <a:ext uri="{FF2B5EF4-FFF2-40B4-BE49-F238E27FC236}">
-                <a16:creationId xmlns:a16="http://schemas.microsoft.com/office/drawing/2014/main" xmlns="" id="{46D81823-6684-46C2-92E6-49029B866FEC}"/>
+                <a16:creationId xmlns="" xmlns:a16="http://schemas.microsoft.com/office/drawing/2014/main" id="{46D81823-6684-46C2-92E6-49029B866FEC}"/>
               </a:ext>
             </a:extLst>
           </p:cNvPr>
@@ -12460,7 +12953,7 @@
           <p:cNvPr id="6" name="ORGANIZAÇÃO-desc">
             <a:extLst>
               <a:ext uri="{FF2B5EF4-FFF2-40B4-BE49-F238E27FC236}">
-                <a16:creationId xmlns:a16="http://schemas.microsoft.com/office/drawing/2014/main" xmlns="" id="{26CC0718-E687-445C-B548-CB0C0178DB70}"/>
+                <a16:creationId xmlns="" xmlns:a16="http://schemas.microsoft.com/office/drawing/2014/main" id="{26CC0718-E687-445C-B548-CB0C0178DB70}"/>
               </a:ext>
             </a:extLst>
           </p:cNvPr>
@@ -12653,7 +13146,7 @@
           <p:cNvPr id="7" name="focus">
             <a:extLst>
               <a:ext uri="{FF2B5EF4-FFF2-40B4-BE49-F238E27FC236}">
-                <a16:creationId xmlns:a16="http://schemas.microsoft.com/office/drawing/2014/main" xmlns="" id="{9425CFDC-886F-42F2-8FD5-3EE8E590E990}"/>
+                <a16:creationId xmlns="" xmlns:a16="http://schemas.microsoft.com/office/drawing/2014/main" id="{9425CFDC-886F-42F2-8FD5-3EE8E590E990}"/>
               </a:ext>
             </a:extLst>
           </p:cNvPr>
@@ -12822,7 +13315,7 @@
           <p:cNvPr id="9" name="Retângulo 8">
             <a:extLst>
               <a:ext uri="{FF2B5EF4-FFF2-40B4-BE49-F238E27FC236}">
-                <a16:creationId xmlns:a16="http://schemas.microsoft.com/office/drawing/2014/main" xmlns="" id="{6D4A0836-98A0-4719-B3FE-17B6C52177DB}"/>
+                <a16:creationId xmlns="" xmlns:a16="http://schemas.microsoft.com/office/drawing/2014/main" id="{6D4A0836-98A0-4719-B3FE-17B6C52177DB}"/>
               </a:ext>
             </a:extLst>
           </p:cNvPr>
@@ -12977,7 +13470,7 @@
     </p:spTree>
     <p:extLst>
       <p:ext uri="{BB962C8B-B14F-4D97-AF65-F5344CB8AC3E}">
-        <p14:creationId xmlns:p14="http://schemas.microsoft.com/office/powerpoint/2010/main" xmlns="" val="1246362876"/>
+        <p14:creationId xmlns="" xmlns:p14="http://schemas.microsoft.com/office/powerpoint/2010/main" val="1246362876"/>
       </p:ext>
     </p:extLst>
   </p:cSld>
@@ -13017,7 +13510,7 @@
           <p:cNvPr id="8" name="Retângulo 7">
             <a:extLst>
               <a:ext uri="{FF2B5EF4-FFF2-40B4-BE49-F238E27FC236}">
-                <a16:creationId xmlns:a16="http://schemas.microsoft.com/office/drawing/2014/main" xmlns="" id="{9762A3CD-B8CB-4F91-A670-EF614BFBADF4}"/>
+                <a16:creationId xmlns="" xmlns:a16="http://schemas.microsoft.com/office/drawing/2014/main" id="{9762A3CD-B8CB-4F91-A670-EF614BFBADF4}"/>
               </a:ext>
             </a:extLst>
           </p:cNvPr>
@@ -13174,7 +13667,7 @@
           <p:cNvPr id="2" name="Retângulo 1">
             <a:extLst>
               <a:ext uri="{FF2B5EF4-FFF2-40B4-BE49-F238E27FC236}">
-                <a16:creationId xmlns:a16="http://schemas.microsoft.com/office/drawing/2014/main" xmlns="" id="{F1166475-5088-4C99-841A-901B19BBB414}"/>
+                <a16:creationId xmlns="" xmlns:a16="http://schemas.microsoft.com/office/drawing/2014/main" id="{F1166475-5088-4C99-841A-901B19BBB414}"/>
               </a:ext>
             </a:extLst>
           </p:cNvPr>
@@ -13354,7 +13847,7 @@
           <p:cNvPr id="3" name="Retângulo 2">
             <a:extLst>
               <a:ext uri="{FF2B5EF4-FFF2-40B4-BE49-F238E27FC236}">
-                <a16:creationId xmlns:a16="http://schemas.microsoft.com/office/drawing/2014/main" xmlns="" id="{9746BEA2-968D-4308-A424-0E1130777407}"/>
+                <a16:creationId xmlns="" xmlns:a16="http://schemas.microsoft.com/office/drawing/2014/main" id="{9746BEA2-968D-4308-A424-0E1130777407}"/>
               </a:ext>
             </a:extLst>
           </p:cNvPr>
@@ -13534,7 +14027,7 @@
           <p:cNvPr id="4" name="Imagem 3">
             <a:extLst>
               <a:ext uri="{FF2B5EF4-FFF2-40B4-BE49-F238E27FC236}">
-                <a16:creationId xmlns:a16="http://schemas.microsoft.com/office/drawing/2014/main" xmlns="" id="{1E3D59A4-EDCD-4BA5-B477-06EA044308A0}"/>
+                <a16:creationId xmlns="" xmlns:a16="http://schemas.microsoft.com/office/drawing/2014/main" id="{1E3D59A4-EDCD-4BA5-B477-06EA044308A0}"/>
               </a:ext>
             </a:extLst>
           </p:cNvPr>
@@ -13562,7 +14055,7 @@
           <p:cNvPr id="5" name="Retângulo 4">
             <a:extLst>
               <a:ext uri="{FF2B5EF4-FFF2-40B4-BE49-F238E27FC236}">
-                <a16:creationId xmlns:a16="http://schemas.microsoft.com/office/drawing/2014/main" xmlns="" id="{59976C1E-2C54-451A-89CD-9366639C78A8}"/>
+                <a16:creationId xmlns="" xmlns:a16="http://schemas.microsoft.com/office/drawing/2014/main" id="{59976C1E-2C54-451A-89CD-9366639C78A8}"/>
               </a:ext>
             </a:extLst>
           </p:cNvPr>
@@ -13719,7 +14212,7 @@
           <p:cNvPr id="6" name="Retângulo 5">
             <a:extLst>
               <a:ext uri="{FF2B5EF4-FFF2-40B4-BE49-F238E27FC236}">
-                <a16:creationId xmlns:a16="http://schemas.microsoft.com/office/drawing/2014/main" xmlns="" id="{419F600D-4B7C-4B8B-9B24-6AB90ADC19DC}"/>
+                <a16:creationId xmlns="" xmlns:a16="http://schemas.microsoft.com/office/drawing/2014/main" id="{419F600D-4B7C-4B8B-9B24-6AB90ADC19DC}"/>
               </a:ext>
             </a:extLst>
           </p:cNvPr>
@@ -13876,7 +14369,7 @@
           <p:cNvPr id="7" name="Retângulo 6">
             <a:extLst>
               <a:ext uri="{FF2B5EF4-FFF2-40B4-BE49-F238E27FC236}">
-                <a16:creationId xmlns:a16="http://schemas.microsoft.com/office/drawing/2014/main" xmlns="" id="{DD8A0406-F59C-4E9D-9C8B-FBECABCD331A}"/>
+                <a16:creationId xmlns="" xmlns:a16="http://schemas.microsoft.com/office/drawing/2014/main" id="{DD8A0406-F59C-4E9D-9C8B-FBECABCD331A}"/>
               </a:ext>
             </a:extLst>
           </p:cNvPr>
@@ -14031,7 +14524,7 @@
     </p:spTree>
     <p:extLst>
       <p:ext uri="{BB962C8B-B14F-4D97-AF65-F5344CB8AC3E}">
-        <p14:creationId xmlns:p14="http://schemas.microsoft.com/office/powerpoint/2010/main" xmlns="" val="1173534956"/>
+        <p14:creationId xmlns="" xmlns:p14="http://schemas.microsoft.com/office/powerpoint/2010/main" val="1173534956"/>
       </p:ext>
     </p:extLst>
   </p:cSld>
@@ -14071,7 +14564,7 @@
           <p:cNvPr id="9" name="Retângulo 8">
             <a:extLst>
               <a:ext uri="{FF2B5EF4-FFF2-40B4-BE49-F238E27FC236}">
-                <a16:creationId xmlns:a16="http://schemas.microsoft.com/office/drawing/2014/main" xmlns="" id="{ECEFAF98-0EF6-405B-B88F-BA61B9965C61}"/>
+                <a16:creationId xmlns="" xmlns:a16="http://schemas.microsoft.com/office/drawing/2014/main" id="{ECEFAF98-0EF6-405B-B88F-BA61B9965C61}"/>
               </a:ext>
             </a:extLst>
           </p:cNvPr>
@@ -14228,7 +14721,7 @@
           <p:cNvPr id="2" name="Imagem 1">
             <a:extLst>
               <a:ext uri="{FF2B5EF4-FFF2-40B4-BE49-F238E27FC236}">
-                <a16:creationId xmlns:a16="http://schemas.microsoft.com/office/drawing/2014/main" xmlns="" id="{9E63DC79-95B3-416F-ADD1-DD3DEE353E19}"/>
+                <a16:creationId xmlns="" xmlns:a16="http://schemas.microsoft.com/office/drawing/2014/main" id="{9E63DC79-95B3-416F-ADD1-DD3DEE353E19}"/>
               </a:ext>
             </a:extLst>
           </p:cNvPr>
@@ -14256,7 +14749,7 @@
           <p:cNvPr id="3" name="Retângulo 2">
             <a:extLst>
               <a:ext uri="{FF2B5EF4-FFF2-40B4-BE49-F238E27FC236}">
-                <a16:creationId xmlns:a16="http://schemas.microsoft.com/office/drawing/2014/main" xmlns="" id="{4C321CB6-733D-47C3-97E8-666BA583A66A}"/>
+                <a16:creationId xmlns="" xmlns:a16="http://schemas.microsoft.com/office/drawing/2014/main" id="{4C321CB6-733D-47C3-97E8-666BA583A66A}"/>
               </a:ext>
             </a:extLst>
           </p:cNvPr>
@@ -14413,7 +14906,7 @@
           <p:cNvPr id="4" name="Retângulo 3">
             <a:extLst>
               <a:ext uri="{FF2B5EF4-FFF2-40B4-BE49-F238E27FC236}">
-                <a16:creationId xmlns:a16="http://schemas.microsoft.com/office/drawing/2014/main" xmlns="" id="{88648190-4514-4F0A-9A06-BFD2A183D38F}"/>
+                <a16:creationId xmlns="" xmlns:a16="http://schemas.microsoft.com/office/drawing/2014/main" id="{88648190-4514-4F0A-9A06-BFD2A183D38F}"/>
               </a:ext>
             </a:extLst>
           </p:cNvPr>
@@ -14593,7 +15086,7 @@
           <p:cNvPr id="5" name="Retângulo 4">
             <a:extLst>
               <a:ext uri="{FF2B5EF4-FFF2-40B4-BE49-F238E27FC236}">
-                <a16:creationId xmlns:a16="http://schemas.microsoft.com/office/drawing/2014/main" xmlns="" id="{7E7950D4-C3DB-4C69-8E77-C0CE547B4B92}"/>
+                <a16:creationId xmlns="" xmlns:a16="http://schemas.microsoft.com/office/drawing/2014/main" id="{7E7950D4-C3DB-4C69-8E77-C0CE547B4B92}"/>
               </a:ext>
             </a:extLst>
           </p:cNvPr>
@@ -14773,7 +15266,7 @@
           <p:cNvPr id="6" name="Retângulo 5">
             <a:extLst>
               <a:ext uri="{FF2B5EF4-FFF2-40B4-BE49-F238E27FC236}">
-                <a16:creationId xmlns:a16="http://schemas.microsoft.com/office/drawing/2014/main" xmlns="" id="{3AFE123F-3E98-4CE3-9227-03E661642D9B}"/>
+                <a16:creationId xmlns="" xmlns:a16="http://schemas.microsoft.com/office/drawing/2014/main" id="{3AFE123F-3E98-4CE3-9227-03E661642D9B}"/>
               </a:ext>
             </a:extLst>
           </p:cNvPr>
@@ -14953,7 +15446,7 @@
           <p:cNvPr id="7" name="Retângulo 6">
             <a:extLst>
               <a:ext uri="{FF2B5EF4-FFF2-40B4-BE49-F238E27FC236}">
-                <a16:creationId xmlns:a16="http://schemas.microsoft.com/office/drawing/2014/main" xmlns="" id="{546F2E1B-9215-493E-9E3A-9ECD6B4ED6FB}"/>
+                <a16:creationId xmlns="" xmlns:a16="http://schemas.microsoft.com/office/drawing/2014/main" id="{546F2E1B-9215-493E-9E3A-9ECD6B4ED6FB}"/>
               </a:ext>
             </a:extLst>
           </p:cNvPr>
@@ -15110,7 +15603,7 @@
           <p:cNvPr id="8" name="Retângulo 7">
             <a:extLst>
               <a:ext uri="{FF2B5EF4-FFF2-40B4-BE49-F238E27FC236}">
-                <a16:creationId xmlns:a16="http://schemas.microsoft.com/office/drawing/2014/main" xmlns="" id="{D055C9FF-C6E6-4BC8-A86F-2EA9A26B5241}"/>
+                <a16:creationId xmlns="" xmlns:a16="http://schemas.microsoft.com/office/drawing/2014/main" id="{D055C9FF-C6E6-4BC8-A86F-2EA9A26B5241}"/>
               </a:ext>
             </a:extLst>
           </p:cNvPr>
@@ -15265,7 +15758,7 @@
     </p:spTree>
     <p:extLst>
       <p:ext uri="{BB962C8B-B14F-4D97-AF65-F5344CB8AC3E}">
-        <p14:creationId xmlns:p14="http://schemas.microsoft.com/office/powerpoint/2010/main" xmlns="" val="828518535"/>
+        <p14:creationId xmlns="" xmlns:p14="http://schemas.microsoft.com/office/powerpoint/2010/main" val="828518535"/>
       </p:ext>
     </p:extLst>
   </p:cSld>
@@ -15305,7 +15798,7 @@
           <p:cNvPr id="17" name="Retângulo 16">
             <a:extLst>
               <a:ext uri="{FF2B5EF4-FFF2-40B4-BE49-F238E27FC236}">
-                <a16:creationId xmlns:a16="http://schemas.microsoft.com/office/drawing/2014/main" xmlns="" id="{CAE9ACC5-10A2-4B47-AB2E-029300727023}"/>
+                <a16:creationId xmlns="" xmlns:a16="http://schemas.microsoft.com/office/drawing/2014/main" id="{CAE9ACC5-10A2-4B47-AB2E-029300727023}"/>
               </a:ext>
             </a:extLst>
           </p:cNvPr>
@@ -15462,7 +15955,7 @@
           <p:cNvPr id="2" name="Retângulo 1">
             <a:extLst>
               <a:ext uri="{FF2B5EF4-FFF2-40B4-BE49-F238E27FC236}">
-                <a16:creationId xmlns:a16="http://schemas.microsoft.com/office/drawing/2014/main" xmlns="" id="{119BDD26-0122-43F3-BF9D-F1E67BF3FB76}"/>
+                <a16:creationId xmlns="" xmlns:a16="http://schemas.microsoft.com/office/drawing/2014/main" id="{119BDD26-0122-43F3-BF9D-F1E67BF3FB76}"/>
               </a:ext>
             </a:extLst>
           </p:cNvPr>
@@ -15649,7 +16142,7 @@
           <p:cNvPr id="3" name="Retângulo 2">
             <a:extLst>
               <a:ext uri="{FF2B5EF4-FFF2-40B4-BE49-F238E27FC236}">
-                <a16:creationId xmlns:a16="http://schemas.microsoft.com/office/drawing/2014/main" xmlns="" id="{162A3F91-5708-4119-BE47-4925FE692ABC}"/>
+                <a16:creationId xmlns="" xmlns:a16="http://schemas.microsoft.com/office/drawing/2014/main" id="{162A3F91-5708-4119-BE47-4925FE692ABC}"/>
               </a:ext>
             </a:extLst>
           </p:cNvPr>
@@ -15790,7 +16283,7 @@
           <p:cNvPr id="4" name="Retângulo 3">
             <a:extLst>
               <a:ext uri="{FF2B5EF4-FFF2-40B4-BE49-F238E27FC236}">
-                <a16:creationId xmlns:a16="http://schemas.microsoft.com/office/drawing/2014/main" xmlns="" id="{DCB35A60-8F26-42A8-982C-EC5282B99E32}"/>
+                <a16:creationId xmlns="" xmlns:a16="http://schemas.microsoft.com/office/drawing/2014/main" id="{DCB35A60-8F26-42A8-982C-EC5282B99E32}"/>
               </a:ext>
             </a:extLst>
           </p:cNvPr>
@@ -15947,7 +16440,7 @@
           <p:cNvPr id="5" name="Retângulo 4">
             <a:extLst>
               <a:ext uri="{FF2B5EF4-FFF2-40B4-BE49-F238E27FC236}">
-                <a16:creationId xmlns:a16="http://schemas.microsoft.com/office/drawing/2014/main" xmlns="" id="{812B7D6A-9376-4BBB-B8F5-F6CD275CF651}"/>
+                <a16:creationId xmlns="" xmlns:a16="http://schemas.microsoft.com/office/drawing/2014/main" id="{812B7D6A-9376-4BBB-B8F5-F6CD275CF651}"/>
               </a:ext>
             </a:extLst>
           </p:cNvPr>
@@ -16131,7 +16624,7 @@
           <p:cNvPr id="6" name="Retângulo 5">
             <a:extLst>
               <a:ext uri="{FF2B5EF4-FFF2-40B4-BE49-F238E27FC236}">
-                <a16:creationId xmlns:a16="http://schemas.microsoft.com/office/drawing/2014/main" xmlns="" id="{931A8589-4D31-4ABF-B685-5FBA399A6954}"/>
+                <a16:creationId xmlns="" xmlns:a16="http://schemas.microsoft.com/office/drawing/2014/main" id="{931A8589-4D31-4ABF-B685-5FBA399A6954}"/>
               </a:ext>
             </a:extLst>
           </p:cNvPr>
@@ -16315,7 +16808,7 @@
           <p:cNvPr id="7" name="Retângulo 6">
             <a:extLst>
               <a:ext uri="{FF2B5EF4-FFF2-40B4-BE49-F238E27FC236}">
-                <a16:creationId xmlns:a16="http://schemas.microsoft.com/office/drawing/2014/main" xmlns="" id="{11049DD8-AAAC-40EC-8AC9-18045A60C726}"/>
+                <a16:creationId xmlns="" xmlns:a16="http://schemas.microsoft.com/office/drawing/2014/main" id="{11049DD8-AAAC-40EC-8AC9-18045A60C726}"/>
               </a:ext>
             </a:extLst>
           </p:cNvPr>
@@ -16499,7 +16992,7 @@
           <p:cNvPr id="8" name="Seta para a esquerda e para a direita 7">
             <a:extLst>
               <a:ext uri="{FF2B5EF4-FFF2-40B4-BE49-F238E27FC236}">
-                <a16:creationId xmlns:a16="http://schemas.microsoft.com/office/drawing/2014/main" xmlns="" id="{8993AF81-28A5-4585-A5CB-567D24F1133F}"/>
+                <a16:creationId xmlns="" xmlns:a16="http://schemas.microsoft.com/office/drawing/2014/main" id="{8993AF81-28A5-4585-A5CB-567D24F1133F}"/>
               </a:ext>
             </a:extLst>
           </p:cNvPr>
@@ -16530,7 +17023,7 @@
           <p:cNvPr id="9" name="Retângulo 8">
             <a:extLst>
               <a:ext uri="{FF2B5EF4-FFF2-40B4-BE49-F238E27FC236}">
-                <a16:creationId xmlns:a16="http://schemas.microsoft.com/office/drawing/2014/main" xmlns="" id="{BC697BF2-E990-4B6E-A9D0-D5FF92D6F120}"/>
+                <a16:creationId xmlns="" xmlns:a16="http://schemas.microsoft.com/office/drawing/2014/main" id="{BC697BF2-E990-4B6E-A9D0-D5FF92D6F120}"/>
               </a:ext>
             </a:extLst>
           </p:cNvPr>
@@ -16710,7 +17203,7 @@
           <p:cNvPr id="10" name="Seta para a direita 9">
             <a:extLst>
               <a:ext uri="{FF2B5EF4-FFF2-40B4-BE49-F238E27FC236}">
-                <a16:creationId xmlns:a16="http://schemas.microsoft.com/office/drawing/2014/main" xmlns="" id="{27B4B819-37DD-4CBA-A4BE-139A4D1079CE}"/>
+                <a16:creationId xmlns="" xmlns:a16="http://schemas.microsoft.com/office/drawing/2014/main" id="{27B4B819-37DD-4CBA-A4BE-139A4D1079CE}"/>
               </a:ext>
             </a:extLst>
           </p:cNvPr>
@@ -16741,7 +17234,7 @@
           <p:cNvPr id="11" name="Seta para baixo 10">
             <a:extLst>
               <a:ext uri="{FF2B5EF4-FFF2-40B4-BE49-F238E27FC236}">
-                <a16:creationId xmlns:a16="http://schemas.microsoft.com/office/drawing/2014/main" xmlns="" id="{4B4A94EC-A82C-4622-92D0-547940696709}"/>
+                <a16:creationId xmlns="" xmlns:a16="http://schemas.microsoft.com/office/drawing/2014/main" id="{4B4A94EC-A82C-4622-92D0-547940696709}"/>
               </a:ext>
             </a:extLst>
           </p:cNvPr>
@@ -16772,7 +17265,7 @@
           <p:cNvPr id="12" name="Seta para baixo 11">
             <a:extLst>
               <a:ext uri="{FF2B5EF4-FFF2-40B4-BE49-F238E27FC236}">
-                <a16:creationId xmlns:a16="http://schemas.microsoft.com/office/drawing/2014/main" xmlns="" id="{7969B318-02F1-4A6A-B4D5-682E8360AC4E}"/>
+                <a16:creationId xmlns="" xmlns:a16="http://schemas.microsoft.com/office/drawing/2014/main" id="{7969B318-02F1-4A6A-B4D5-682E8360AC4E}"/>
               </a:ext>
             </a:extLst>
           </p:cNvPr>
@@ -16803,7 +17296,7 @@
           <p:cNvPr id="13" name="Retângulo 12">
             <a:extLst>
               <a:ext uri="{FF2B5EF4-FFF2-40B4-BE49-F238E27FC236}">
-                <a16:creationId xmlns:a16="http://schemas.microsoft.com/office/drawing/2014/main" xmlns="" id="{93F50F39-A059-4F84-B367-5AF9F154A3C9}"/>
+                <a16:creationId xmlns="" xmlns:a16="http://schemas.microsoft.com/office/drawing/2014/main" id="{93F50F39-A059-4F84-B367-5AF9F154A3C9}"/>
               </a:ext>
             </a:extLst>
           </p:cNvPr>
@@ -16960,7 +17453,7 @@
           <p:cNvPr id="14" name="Retângulo 13">
             <a:extLst>
               <a:ext uri="{FF2B5EF4-FFF2-40B4-BE49-F238E27FC236}">
-                <a16:creationId xmlns:a16="http://schemas.microsoft.com/office/drawing/2014/main" xmlns="" id="{2ECF6EFA-7840-4D4C-BD73-7A9CA8639F01}"/>
+                <a16:creationId xmlns="" xmlns:a16="http://schemas.microsoft.com/office/drawing/2014/main" id="{2ECF6EFA-7840-4D4C-BD73-7A9CA8639F01}"/>
               </a:ext>
             </a:extLst>
           </p:cNvPr>
@@ -17117,7 +17610,7 @@
           <p:cNvPr id="15" name="Retângulo 14">
             <a:extLst>
               <a:ext uri="{FF2B5EF4-FFF2-40B4-BE49-F238E27FC236}">
-                <a16:creationId xmlns:a16="http://schemas.microsoft.com/office/drawing/2014/main" xmlns="" id="{29409C46-3C84-47D2-9037-E63CEE5DD53C}"/>
+                <a16:creationId xmlns="" xmlns:a16="http://schemas.microsoft.com/office/drawing/2014/main" id="{29409C46-3C84-47D2-9037-E63CEE5DD53C}"/>
               </a:ext>
             </a:extLst>
           </p:cNvPr>
@@ -17274,7 +17767,7 @@
           <p:cNvPr id="16" name="Retângulo 15">
             <a:extLst>
               <a:ext uri="{FF2B5EF4-FFF2-40B4-BE49-F238E27FC236}">
-                <a16:creationId xmlns:a16="http://schemas.microsoft.com/office/drawing/2014/main" xmlns="" id="{9CE2F47E-FEBB-47B9-923C-2C16ADBD7DFD}"/>
+                <a16:creationId xmlns="" xmlns:a16="http://schemas.microsoft.com/office/drawing/2014/main" id="{9CE2F47E-FEBB-47B9-923C-2C16ADBD7DFD}"/>
               </a:ext>
             </a:extLst>
           </p:cNvPr>
@@ -17429,7 +17922,7 @@
     </p:spTree>
     <p:extLst>
       <p:ext uri="{BB962C8B-B14F-4D97-AF65-F5344CB8AC3E}">
-        <p14:creationId xmlns:p14="http://schemas.microsoft.com/office/powerpoint/2010/main" xmlns="" val="663096400"/>
+        <p14:creationId xmlns="" xmlns:p14="http://schemas.microsoft.com/office/powerpoint/2010/main" val="663096400"/>
       </p:ext>
     </p:extLst>
   </p:cSld>
@@ -17469,7 +17962,7 @@
           <p:cNvPr id="13" name="Retângulo 12">
             <a:extLst>
               <a:ext uri="{FF2B5EF4-FFF2-40B4-BE49-F238E27FC236}">
-                <a16:creationId xmlns:a16="http://schemas.microsoft.com/office/drawing/2014/main" xmlns="" id="{6338AA60-CB48-42FA-A663-D923779852AA}"/>
+                <a16:creationId xmlns="" xmlns:a16="http://schemas.microsoft.com/office/drawing/2014/main" id="{6338AA60-CB48-42FA-A663-D923779852AA}"/>
               </a:ext>
             </a:extLst>
           </p:cNvPr>
@@ -17626,7 +18119,7 @@
           <p:cNvPr id="2" name="Retângulo 1">
             <a:extLst>
               <a:ext uri="{FF2B5EF4-FFF2-40B4-BE49-F238E27FC236}">
-                <a16:creationId xmlns:a16="http://schemas.microsoft.com/office/drawing/2014/main" xmlns="" id="{E36986BF-AFFD-4267-8063-6A2A9F736108}"/>
+                <a16:creationId xmlns="" xmlns:a16="http://schemas.microsoft.com/office/drawing/2014/main" id="{E36986BF-AFFD-4267-8063-6A2A9F736108}"/>
               </a:ext>
             </a:extLst>
           </p:cNvPr>
@@ -17783,7 +18276,7 @@
           <p:cNvPr id="3" name="Retângulo 2">
             <a:extLst>
               <a:ext uri="{FF2B5EF4-FFF2-40B4-BE49-F238E27FC236}">
-                <a16:creationId xmlns:a16="http://schemas.microsoft.com/office/drawing/2014/main" xmlns="" id="{E7EBFCE7-87BF-44F0-9450-86F10CCC93A6}"/>
+                <a16:creationId xmlns="" xmlns:a16="http://schemas.microsoft.com/office/drawing/2014/main" id="{E7EBFCE7-87BF-44F0-9450-86F10CCC93A6}"/>
               </a:ext>
             </a:extLst>
           </p:cNvPr>
@@ -17944,7 +18437,7 @@
           <p:cNvPr id="4" name="Retângulo 3">
             <a:extLst>
               <a:ext uri="{FF2B5EF4-FFF2-40B4-BE49-F238E27FC236}">
-                <a16:creationId xmlns:a16="http://schemas.microsoft.com/office/drawing/2014/main" xmlns="" id="{57A60D08-B74C-42C7-B9CF-A9523DEC57A0}"/>
+                <a16:creationId xmlns="" xmlns:a16="http://schemas.microsoft.com/office/drawing/2014/main" id="{57A60D08-B74C-42C7-B9CF-A9523DEC57A0}"/>
               </a:ext>
             </a:extLst>
           </p:cNvPr>
@@ -18105,7 +18598,7 @@
           <p:cNvPr id="5" name="Retângulo 4">
             <a:extLst>
               <a:ext uri="{FF2B5EF4-FFF2-40B4-BE49-F238E27FC236}">
-                <a16:creationId xmlns:a16="http://schemas.microsoft.com/office/drawing/2014/main" xmlns="" id="{5236922A-544A-419C-B920-B527479D2189}"/>
+                <a16:creationId xmlns="" xmlns:a16="http://schemas.microsoft.com/office/drawing/2014/main" id="{5236922A-544A-419C-B920-B527479D2189}"/>
               </a:ext>
             </a:extLst>
           </p:cNvPr>
@@ -18289,7 +18782,7 @@
           <p:cNvPr id="6" name="Seta para a direita 5">
             <a:extLst>
               <a:ext uri="{FF2B5EF4-FFF2-40B4-BE49-F238E27FC236}">
-                <a16:creationId xmlns:a16="http://schemas.microsoft.com/office/drawing/2014/main" xmlns="" id="{A5F96783-C62A-496B-9D3E-ED533DCD9857}"/>
+                <a16:creationId xmlns="" xmlns:a16="http://schemas.microsoft.com/office/drawing/2014/main" id="{A5F96783-C62A-496B-9D3E-ED533DCD9857}"/>
               </a:ext>
             </a:extLst>
           </p:cNvPr>
@@ -18320,7 +18813,7 @@
           <p:cNvPr id="7" name="Seta para a direita 6">
             <a:extLst>
               <a:ext uri="{FF2B5EF4-FFF2-40B4-BE49-F238E27FC236}">
-                <a16:creationId xmlns:a16="http://schemas.microsoft.com/office/drawing/2014/main" xmlns="" id="{4A4C5FF5-2C37-4FCE-93F7-0101137387B0}"/>
+                <a16:creationId xmlns="" xmlns:a16="http://schemas.microsoft.com/office/drawing/2014/main" id="{4A4C5FF5-2C37-4FCE-93F7-0101137387B0}"/>
               </a:ext>
             </a:extLst>
           </p:cNvPr>
@@ -18351,7 +18844,7 @@
           <p:cNvPr id="8" name="Seta para a direita 7">
             <a:extLst>
               <a:ext uri="{FF2B5EF4-FFF2-40B4-BE49-F238E27FC236}">
-                <a16:creationId xmlns:a16="http://schemas.microsoft.com/office/drawing/2014/main" xmlns="" id="{47D4560D-FFC5-444D-BE26-E79921338523}"/>
+                <a16:creationId xmlns="" xmlns:a16="http://schemas.microsoft.com/office/drawing/2014/main" id="{47D4560D-FFC5-444D-BE26-E79921338523}"/>
               </a:ext>
             </a:extLst>
           </p:cNvPr>
@@ -18382,7 +18875,7 @@
           <p:cNvPr id="9" name="Retângulo 8">
             <a:extLst>
               <a:ext uri="{FF2B5EF4-FFF2-40B4-BE49-F238E27FC236}">
-                <a16:creationId xmlns:a16="http://schemas.microsoft.com/office/drawing/2014/main" xmlns="" id="{7E51F59C-E2FA-4030-A8DF-40501ECD57A0}"/>
+                <a16:creationId xmlns="" xmlns:a16="http://schemas.microsoft.com/office/drawing/2014/main" id="{7E51F59C-E2FA-4030-A8DF-40501ECD57A0}"/>
               </a:ext>
             </a:extLst>
           </p:cNvPr>
@@ -18543,7 +19036,7 @@
           <p:cNvPr id="10" name="Retângulo 9">
             <a:extLst>
               <a:ext uri="{FF2B5EF4-FFF2-40B4-BE49-F238E27FC236}">
-                <a16:creationId xmlns:a16="http://schemas.microsoft.com/office/drawing/2014/main" xmlns="" id="{D068F516-490A-4FD0-BE47-1B161159E77D}"/>
+                <a16:creationId xmlns="" xmlns:a16="http://schemas.microsoft.com/office/drawing/2014/main" id="{D068F516-490A-4FD0-BE47-1B161159E77D}"/>
               </a:ext>
             </a:extLst>
           </p:cNvPr>
@@ -18700,7 +19193,7 @@
           <p:cNvPr id="11" name="Retângulo 10">
             <a:extLst>
               <a:ext uri="{FF2B5EF4-FFF2-40B4-BE49-F238E27FC236}">
-                <a16:creationId xmlns:a16="http://schemas.microsoft.com/office/drawing/2014/main" xmlns="" id="{53BFB01B-D7E8-4B0D-A352-CF384D57EE37}"/>
+                <a16:creationId xmlns="" xmlns:a16="http://schemas.microsoft.com/office/drawing/2014/main" id="{53BFB01B-D7E8-4B0D-A352-CF384D57EE37}"/>
               </a:ext>
             </a:extLst>
           </p:cNvPr>
@@ -18857,7 +19350,7 @@
           <p:cNvPr id="12" name="Retângulo 11">
             <a:extLst>
               <a:ext uri="{FF2B5EF4-FFF2-40B4-BE49-F238E27FC236}">
-                <a16:creationId xmlns:a16="http://schemas.microsoft.com/office/drawing/2014/main" xmlns="" id="{85F6D993-3D9D-4E70-8CC5-B801C493185C}"/>
+                <a16:creationId xmlns="" xmlns:a16="http://schemas.microsoft.com/office/drawing/2014/main" id="{85F6D993-3D9D-4E70-8CC5-B801C493185C}"/>
               </a:ext>
             </a:extLst>
           </p:cNvPr>
@@ -19012,7 +19505,7 @@
     </p:spTree>
     <p:extLst>
       <p:ext uri="{BB962C8B-B14F-4D97-AF65-F5344CB8AC3E}">
-        <p14:creationId xmlns:p14="http://schemas.microsoft.com/office/powerpoint/2010/main" xmlns="" val="921913000"/>
+        <p14:creationId xmlns="" xmlns:p14="http://schemas.microsoft.com/office/powerpoint/2010/main" val="921913000"/>
       </p:ext>
     </p:extLst>
   </p:cSld>
@@ -19052,7 +19545,7 @@
           <p:cNvPr id="12" name="Retângulo 11">
             <a:extLst>
               <a:ext uri="{FF2B5EF4-FFF2-40B4-BE49-F238E27FC236}">
-                <a16:creationId xmlns:a16="http://schemas.microsoft.com/office/drawing/2014/main" xmlns="" id="{1244D830-A529-4C15-9A70-EFCD3E343543}"/>
+                <a16:creationId xmlns="" xmlns:a16="http://schemas.microsoft.com/office/drawing/2014/main" id="{1244D830-A529-4C15-9A70-EFCD3E343543}"/>
               </a:ext>
             </a:extLst>
           </p:cNvPr>
@@ -19209,7 +19702,7 @@
           <p:cNvPr id="2" name="Retângulo 1">
             <a:extLst>
               <a:ext uri="{FF2B5EF4-FFF2-40B4-BE49-F238E27FC236}">
-                <a16:creationId xmlns:a16="http://schemas.microsoft.com/office/drawing/2014/main" xmlns="" id="{2378729C-CB48-4F0E-BCCE-6CE0DBFF9565}"/>
+                <a16:creationId xmlns="" xmlns:a16="http://schemas.microsoft.com/office/drawing/2014/main" id="{2378729C-CB48-4F0E-BCCE-6CE0DBFF9565}"/>
               </a:ext>
             </a:extLst>
           </p:cNvPr>
@@ -19366,7 +19859,7 @@
           <p:cNvPr id="3" name="Retângulo 2">
             <a:extLst>
               <a:ext uri="{FF2B5EF4-FFF2-40B4-BE49-F238E27FC236}">
-                <a16:creationId xmlns:a16="http://schemas.microsoft.com/office/drawing/2014/main" xmlns="" id="{ED117EE1-4521-443A-A5BC-1B37B3963BEC}"/>
+                <a16:creationId xmlns="" xmlns:a16="http://schemas.microsoft.com/office/drawing/2014/main" id="{ED117EE1-4521-443A-A5BC-1B37B3963BEC}"/>
               </a:ext>
             </a:extLst>
           </p:cNvPr>
@@ -19550,7 +20043,7 @@
           <p:cNvPr id="4" name="Retângulo 3">
             <a:extLst>
               <a:ext uri="{FF2B5EF4-FFF2-40B4-BE49-F238E27FC236}">
-                <a16:creationId xmlns:a16="http://schemas.microsoft.com/office/drawing/2014/main" xmlns="" id="{6FCE09D3-F8B7-400D-B258-AE055E4E978C}"/>
+                <a16:creationId xmlns="" xmlns:a16="http://schemas.microsoft.com/office/drawing/2014/main" id="{6FCE09D3-F8B7-400D-B258-AE055E4E978C}"/>
               </a:ext>
             </a:extLst>
           </p:cNvPr>
@@ -19734,7 +20227,7 @@
           <p:cNvPr id="5" name="Retângulo 4">
             <a:extLst>
               <a:ext uri="{FF2B5EF4-FFF2-40B4-BE49-F238E27FC236}">
-                <a16:creationId xmlns:a16="http://schemas.microsoft.com/office/drawing/2014/main" xmlns="" id="{E13B8C9D-F4C8-4271-B5CB-135C72815D42}"/>
+                <a16:creationId xmlns="" xmlns:a16="http://schemas.microsoft.com/office/drawing/2014/main" id="{E13B8C9D-F4C8-4271-B5CB-135C72815D42}"/>
               </a:ext>
             </a:extLst>
           </p:cNvPr>
@@ -19918,7 +20411,7 @@
           <p:cNvPr id="6" name="Retângulo 5">
             <a:extLst>
               <a:ext uri="{FF2B5EF4-FFF2-40B4-BE49-F238E27FC236}">
-                <a16:creationId xmlns:a16="http://schemas.microsoft.com/office/drawing/2014/main" xmlns="" id="{E8A611A2-C7E7-45CE-9822-AF1B170254DB}"/>
+                <a16:creationId xmlns="" xmlns:a16="http://schemas.microsoft.com/office/drawing/2014/main" id="{E8A611A2-C7E7-45CE-9822-AF1B170254DB}"/>
               </a:ext>
             </a:extLst>
           </p:cNvPr>
@@ -20075,7 +20568,7 @@
           <p:cNvPr id="7" name="Retângulo 6">
             <a:extLst>
               <a:ext uri="{FF2B5EF4-FFF2-40B4-BE49-F238E27FC236}">
-                <a16:creationId xmlns:a16="http://schemas.microsoft.com/office/drawing/2014/main" xmlns="" id="{BC7F3DD7-4DA9-4998-9CFD-3B85B2B12C7D}"/>
+                <a16:creationId xmlns="" xmlns:a16="http://schemas.microsoft.com/office/drawing/2014/main" id="{BC7F3DD7-4DA9-4998-9CFD-3B85B2B12C7D}"/>
               </a:ext>
             </a:extLst>
           </p:cNvPr>
@@ -20232,7 +20725,7 @@
           <p:cNvPr id="8" name="Retângulo 7">
             <a:extLst>
               <a:ext uri="{FF2B5EF4-FFF2-40B4-BE49-F238E27FC236}">
-                <a16:creationId xmlns:a16="http://schemas.microsoft.com/office/drawing/2014/main" xmlns="" id="{E3B61881-C652-498D-A01C-B4ED9445BD85}"/>
+                <a16:creationId xmlns="" xmlns:a16="http://schemas.microsoft.com/office/drawing/2014/main" id="{E3B61881-C652-498D-A01C-B4ED9445BD85}"/>
               </a:ext>
             </a:extLst>
           </p:cNvPr>
@@ -20389,7 +20882,7 @@
           <p:cNvPr id="9" name="Retângulo 8">
             <a:extLst>
               <a:ext uri="{FF2B5EF4-FFF2-40B4-BE49-F238E27FC236}">
-                <a16:creationId xmlns:a16="http://schemas.microsoft.com/office/drawing/2014/main" xmlns="" id="{A9C83FE5-3E6C-4D03-95FC-DA4636725669}"/>
+                <a16:creationId xmlns="" xmlns:a16="http://schemas.microsoft.com/office/drawing/2014/main" id="{A9C83FE5-3E6C-4D03-95FC-DA4636725669}"/>
               </a:ext>
             </a:extLst>
           </p:cNvPr>
@@ -20546,7 +21039,7 @@
           <p:cNvPr id="10" name="Retângulo 9">
             <a:extLst>
               <a:ext uri="{FF2B5EF4-FFF2-40B4-BE49-F238E27FC236}">
-                <a16:creationId xmlns:a16="http://schemas.microsoft.com/office/drawing/2014/main" xmlns="" id="{43EB8935-F641-4423-BA57-67CD7ECE3BA3}"/>
+                <a16:creationId xmlns="" xmlns:a16="http://schemas.microsoft.com/office/drawing/2014/main" id="{43EB8935-F641-4423-BA57-67CD7ECE3BA3}"/>
               </a:ext>
             </a:extLst>
           </p:cNvPr>
@@ -20703,7 +21196,7 @@
           <p:cNvPr id="11" name="Retângulo 10">
             <a:extLst>
               <a:ext uri="{FF2B5EF4-FFF2-40B4-BE49-F238E27FC236}">
-                <a16:creationId xmlns:a16="http://schemas.microsoft.com/office/drawing/2014/main" xmlns="" id="{C372FD30-E5E4-4F17-BB9A-C6C7F86E3A1F}"/>
+                <a16:creationId xmlns="" xmlns:a16="http://schemas.microsoft.com/office/drawing/2014/main" id="{C372FD30-E5E4-4F17-BB9A-C6C7F86E3A1F}"/>
               </a:ext>
             </a:extLst>
           </p:cNvPr>
@@ -20858,7 +21351,7 @@
     </p:spTree>
     <p:extLst>
       <p:ext uri="{BB962C8B-B14F-4D97-AF65-F5344CB8AC3E}">
-        <p14:creationId xmlns:p14="http://schemas.microsoft.com/office/powerpoint/2010/main" xmlns="" val="1148417449"/>
+        <p14:creationId xmlns="" xmlns:p14="http://schemas.microsoft.com/office/powerpoint/2010/main" val="1148417449"/>
       </p:ext>
     </p:extLst>
   </p:cSld>
@@ -20898,7 +21391,7 @@
           <p:cNvPr id="8" name="heading">
             <a:extLst>
               <a:ext uri="{FF2B5EF4-FFF2-40B4-BE49-F238E27FC236}">
-                <a16:creationId xmlns:a16="http://schemas.microsoft.com/office/drawing/2014/main" xmlns="" id="{C1E30FA4-F20F-48E9-8038-CE419A34A829}"/>
+                <a16:creationId xmlns="" xmlns:a16="http://schemas.microsoft.com/office/drawing/2014/main" id="{C1E30FA4-F20F-48E9-8038-CE419A34A829}"/>
               </a:ext>
             </a:extLst>
           </p:cNvPr>
@@ -21067,7 +21560,7 @@
           <p:cNvPr id="3" name="PC-label">
             <a:extLst>
               <a:ext uri="{FF2B5EF4-FFF2-40B4-BE49-F238E27FC236}">
-                <a16:creationId xmlns:a16="http://schemas.microsoft.com/office/drawing/2014/main" xmlns="" id="{6852AD16-BE60-4521-A873-65D496FAED2B}"/>
+                <a16:creationId xmlns="" xmlns:a16="http://schemas.microsoft.com/office/drawing/2014/main" id="{6852AD16-BE60-4521-A873-65D496FAED2B}"/>
               </a:ext>
             </a:extLst>
           </p:cNvPr>
@@ -21236,7 +21729,7 @@
           <p:cNvPr id="4" name="PC-desc">
             <a:extLst>
               <a:ext uri="{FF2B5EF4-FFF2-40B4-BE49-F238E27FC236}">
-                <a16:creationId xmlns:a16="http://schemas.microsoft.com/office/drawing/2014/main" xmlns="" id="{006B9F50-0CF2-40A2-A402-3E7FB8C2F6FC}"/>
+                <a16:creationId xmlns="" xmlns:a16="http://schemas.microsoft.com/office/drawing/2014/main" id="{006B9F50-0CF2-40A2-A402-3E7FB8C2F6FC}"/>
               </a:ext>
             </a:extLst>
           </p:cNvPr>
@@ -21429,7 +21922,7 @@
           <p:cNvPr id="5" name="RI-label">
             <a:extLst>
               <a:ext uri="{FF2B5EF4-FFF2-40B4-BE49-F238E27FC236}">
-                <a16:creationId xmlns:a16="http://schemas.microsoft.com/office/drawing/2014/main" xmlns="" id="{F418F54B-0C1E-4732-9281-D851E6C806CE}"/>
+                <a16:creationId xmlns="" xmlns:a16="http://schemas.microsoft.com/office/drawing/2014/main" id="{F418F54B-0C1E-4732-9281-D851E6C806CE}"/>
               </a:ext>
             </a:extLst>
           </p:cNvPr>
@@ -21598,7 +22091,7 @@
           <p:cNvPr id="6" name="RI-desc">
             <a:extLst>
               <a:ext uri="{FF2B5EF4-FFF2-40B4-BE49-F238E27FC236}">
-                <a16:creationId xmlns:a16="http://schemas.microsoft.com/office/drawing/2014/main" xmlns="" id="{A7742194-48BD-41C4-95B3-BAF0AB80287E}"/>
+                <a16:creationId xmlns="" xmlns:a16="http://schemas.microsoft.com/office/drawing/2014/main" id="{A7742194-48BD-41C4-95B3-BAF0AB80287E}"/>
               </a:ext>
             </a:extLst>
           </p:cNvPr>
@@ -21791,7 +22284,7 @@
           <p:cNvPr id="7" name="pc-example">
             <a:extLst>
               <a:ext uri="{FF2B5EF4-FFF2-40B4-BE49-F238E27FC236}">
-                <a16:creationId xmlns:a16="http://schemas.microsoft.com/office/drawing/2014/main" xmlns="" id="{89C8F27D-F97C-4360-B55A-713D220B584E}"/>
+                <a16:creationId xmlns="" xmlns:a16="http://schemas.microsoft.com/office/drawing/2014/main" id="{89C8F27D-F97C-4360-B55A-713D220B584E}"/>
               </a:ext>
             </a:extLst>
           </p:cNvPr>
@@ -21960,7 +22453,7 @@
           <p:cNvPr id="9" name="Retângulo 8">
             <a:extLst>
               <a:ext uri="{FF2B5EF4-FFF2-40B4-BE49-F238E27FC236}">
-                <a16:creationId xmlns:a16="http://schemas.microsoft.com/office/drawing/2014/main" xmlns="" id="{C239133C-7406-439D-B623-6C1C4EBD4D65}"/>
+                <a16:creationId xmlns="" xmlns:a16="http://schemas.microsoft.com/office/drawing/2014/main" id="{C239133C-7406-439D-B623-6C1C4EBD4D65}"/>
               </a:ext>
             </a:extLst>
           </p:cNvPr>
@@ -22115,7 +22608,7 @@
     </p:spTree>
     <p:extLst>
       <p:ext uri="{BB962C8B-B14F-4D97-AF65-F5344CB8AC3E}">
-        <p14:creationId xmlns:p14="http://schemas.microsoft.com/office/powerpoint/2010/main" xmlns="" val="591529123"/>
+        <p14:creationId xmlns="" xmlns:p14="http://schemas.microsoft.com/office/powerpoint/2010/main" val="591529123"/>
       </p:ext>
     </p:extLst>
   </p:cSld>
@@ -22155,7 +22648,7 @@
           <p:cNvPr id="10" name="Retângulo 9">
             <a:extLst>
               <a:ext uri="{FF2B5EF4-FFF2-40B4-BE49-F238E27FC236}">
-                <a16:creationId xmlns:a16="http://schemas.microsoft.com/office/drawing/2014/main" xmlns="" id="{88C2FF3F-6A4D-4D66-92C3-5A9B82237C72}"/>
+                <a16:creationId xmlns="" xmlns:a16="http://schemas.microsoft.com/office/drawing/2014/main" id="{88C2FF3F-6A4D-4D66-92C3-5A9B82237C72}"/>
               </a:ext>
             </a:extLst>
           </p:cNvPr>
@@ -22312,7 +22805,7 @@
           <p:cNvPr id="2" name="Retângulo 1">
             <a:extLst>
               <a:ext uri="{FF2B5EF4-FFF2-40B4-BE49-F238E27FC236}">
-                <a16:creationId xmlns:a16="http://schemas.microsoft.com/office/drawing/2014/main" xmlns="" id="{D65DC983-3E85-478B-83C5-8F3E96058FCB}"/>
+                <a16:creationId xmlns="" xmlns:a16="http://schemas.microsoft.com/office/drawing/2014/main" id="{D65DC983-3E85-478B-83C5-8F3E96058FCB}"/>
               </a:ext>
             </a:extLst>
           </p:cNvPr>
@@ -22469,7 +22962,7 @@
           <p:cNvPr id="3" name="Retângulo 2">
             <a:extLst>
               <a:ext uri="{FF2B5EF4-FFF2-40B4-BE49-F238E27FC236}">
-                <a16:creationId xmlns:a16="http://schemas.microsoft.com/office/drawing/2014/main" xmlns="" id="{BFDC5FE1-B91F-49EF-A20B-454223FCA625}"/>
+                <a16:creationId xmlns="" xmlns:a16="http://schemas.microsoft.com/office/drawing/2014/main" id="{BFDC5FE1-B91F-49EF-A20B-454223FCA625}"/>
               </a:ext>
             </a:extLst>
           </p:cNvPr>
@@ -22653,7 +23146,7 @@
           <p:cNvPr id="4" name="Seta para a direita 3">
             <a:extLst>
               <a:ext uri="{FF2B5EF4-FFF2-40B4-BE49-F238E27FC236}">
-                <a16:creationId xmlns:a16="http://schemas.microsoft.com/office/drawing/2014/main" xmlns="" id="{8E826AA2-3FDE-47B3-A1E6-F9898F6EECBA}"/>
+                <a16:creationId xmlns="" xmlns:a16="http://schemas.microsoft.com/office/drawing/2014/main" id="{8E826AA2-3FDE-47B3-A1E6-F9898F6EECBA}"/>
               </a:ext>
             </a:extLst>
           </p:cNvPr>
@@ -22684,7 +23177,7 @@
           <p:cNvPr id="5" name="Retângulo 4">
             <a:extLst>
               <a:ext uri="{FF2B5EF4-FFF2-40B4-BE49-F238E27FC236}">
-                <a16:creationId xmlns:a16="http://schemas.microsoft.com/office/drawing/2014/main" xmlns="" id="{B67ABB1A-039D-48C4-AC75-C549ABF7CE47}"/>
+                <a16:creationId xmlns="" xmlns:a16="http://schemas.microsoft.com/office/drawing/2014/main" id="{B67ABB1A-039D-48C4-AC75-C549ABF7CE47}"/>
               </a:ext>
             </a:extLst>
           </p:cNvPr>
@@ -22868,7 +23361,7 @@
           <p:cNvPr id="6" name="Seta para a direita 5">
             <a:extLst>
               <a:ext uri="{FF2B5EF4-FFF2-40B4-BE49-F238E27FC236}">
-                <a16:creationId xmlns:a16="http://schemas.microsoft.com/office/drawing/2014/main" xmlns="" id="{74A5C01B-8F45-4E2D-8ECC-27E53B6E3F0A}"/>
+                <a16:creationId xmlns="" xmlns:a16="http://schemas.microsoft.com/office/drawing/2014/main" id="{74A5C01B-8F45-4E2D-8ECC-27E53B6E3F0A}"/>
               </a:ext>
             </a:extLst>
           </p:cNvPr>
@@ -22899,7 +23392,7 @@
           <p:cNvPr id="7" name="Retângulo 6">
             <a:extLst>
               <a:ext uri="{FF2B5EF4-FFF2-40B4-BE49-F238E27FC236}">
-                <a16:creationId xmlns:a16="http://schemas.microsoft.com/office/drawing/2014/main" xmlns="" id="{1890801F-35E7-4D00-902D-7395D4DE8646}"/>
+                <a16:creationId xmlns="" xmlns:a16="http://schemas.microsoft.com/office/drawing/2014/main" id="{1890801F-35E7-4D00-902D-7395D4DE8646}"/>
               </a:ext>
             </a:extLst>
           </p:cNvPr>
@@ -23108,7 +23601,7 @@
           <p:cNvPr id="8" name="Retângulo 7">
             <a:extLst>
               <a:ext uri="{FF2B5EF4-FFF2-40B4-BE49-F238E27FC236}">
-                <a16:creationId xmlns:a16="http://schemas.microsoft.com/office/drawing/2014/main" xmlns="" id="{D4E2B839-D416-4E03-BF09-4EB81503A00D}"/>
+                <a16:creationId xmlns="" xmlns:a16="http://schemas.microsoft.com/office/drawing/2014/main" id="{D4E2B839-D416-4E03-BF09-4EB81503A00D}"/>
               </a:ext>
             </a:extLst>
           </p:cNvPr>
@@ -23265,7 +23758,7 @@
           <p:cNvPr id="9" name="Retângulo 8">
             <a:extLst>
               <a:ext uri="{FF2B5EF4-FFF2-40B4-BE49-F238E27FC236}">
-                <a16:creationId xmlns:a16="http://schemas.microsoft.com/office/drawing/2014/main" xmlns="" id="{C1B8C131-B746-4890-8EA8-B4422F3B0E9D}"/>
+                <a16:creationId xmlns="" xmlns:a16="http://schemas.microsoft.com/office/drawing/2014/main" id="{C1B8C131-B746-4890-8EA8-B4422F3B0E9D}"/>
               </a:ext>
             </a:extLst>
           </p:cNvPr>
@@ -23420,7 +23913,7 @@
     </p:spTree>
     <p:extLst>
       <p:ext uri="{BB962C8B-B14F-4D97-AF65-F5344CB8AC3E}">
-        <p14:creationId xmlns:p14="http://schemas.microsoft.com/office/powerpoint/2010/main" xmlns="" val="1413447013"/>
+        <p14:creationId xmlns="" xmlns:p14="http://schemas.microsoft.com/office/powerpoint/2010/main" val="1413447013"/>
       </p:ext>
     </p:extLst>
   </p:cSld>
